--- a/slides/day 4/D4C2_ProbNNs.pptx
+++ b/slides/day 4/D4C2_ProbNNs.pptx
@@ -5,7 +5,7 @@
     <p:sldMasterId id="2147483648" r:id="rId1"/>
   </p:sldMasterIdLst>
   <p:notesMasterIdLst>
-    <p:notesMasterId r:id="rId26"/>
+    <p:notesMasterId r:id="rId28"/>
   </p:notesMasterIdLst>
   <p:sldIdLst>
     <p:sldId id="256" r:id="rId2"/>
@@ -14,24 +14,26 @@
     <p:sldId id="367" r:id="rId5"/>
     <p:sldId id="372" r:id="rId6"/>
     <p:sldId id="368" r:id="rId7"/>
-    <p:sldId id="369" r:id="rId8"/>
-    <p:sldId id="370" r:id="rId9"/>
-    <p:sldId id="374" r:id="rId10"/>
-    <p:sldId id="388" r:id="rId11"/>
-    <p:sldId id="389" r:id="rId12"/>
-    <p:sldId id="375" r:id="rId13"/>
-    <p:sldId id="378" r:id="rId14"/>
-    <p:sldId id="379" r:id="rId15"/>
-    <p:sldId id="390" r:id="rId16"/>
-    <p:sldId id="391" r:id="rId17"/>
-    <p:sldId id="382" r:id="rId18"/>
-    <p:sldId id="380" r:id="rId19"/>
-    <p:sldId id="384" r:id="rId20"/>
-    <p:sldId id="285" r:id="rId21"/>
-    <p:sldId id="392" r:id="rId22"/>
-    <p:sldId id="321" r:id="rId23"/>
-    <p:sldId id="393" r:id="rId24"/>
-    <p:sldId id="322" r:id="rId25"/>
+    <p:sldId id="394" r:id="rId8"/>
+    <p:sldId id="369" r:id="rId9"/>
+    <p:sldId id="370" r:id="rId10"/>
+    <p:sldId id="395" r:id="rId11"/>
+    <p:sldId id="374" r:id="rId12"/>
+    <p:sldId id="388" r:id="rId13"/>
+    <p:sldId id="389" r:id="rId14"/>
+    <p:sldId id="375" r:id="rId15"/>
+    <p:sldId id="378" r:id="rId16"/>
+    <p:sldId id="379" r:id="rId17"/>
+    <p:sldId id="390" r:id="rId18"/>
+    <p:sldId id="391" r:id="rId19"/>
+    <p:sldId id="382" r:id="rId20"/>
+    <p:sldId id="380" r:id="rId21"/>
+    <p:sldId id="384" r:id="rId22"/>
+    <p:sldId id="285" r:id="rId23"/>
+    <p:sldId id="392" r:id="rId24"/>
+    <p:sldId id="321" r:id="rId25"/>
+    <p:sldId id="393" r:id="rId26"/>
+    <p:sldId id="322" r:id="rId27"/>
   </p:sldIdLst>
   <p:sldSz cx="12192000" cy="6858000"/>
   <p:notesSz cx="6858000" cy="9144000"/>
@@ -1361,7 +1363,7 @@
           <a:p>
             <a:fld id="{FF5685EE-3D40-0A4E-BB88-46887330FC0A}" type="datetimeFigureOut">
               <a:rPr lang="en-US" smtClean="0"/>
-              <a:t>10/8/25</a:t>
+              <a:t>2/20/26</a:t>
             </a:fld>
             <a:endParaRPr lang="en-US"/>
           </a:p>
@@ -1629,6 +1631,444 @@
 </p:notesMaster>
 </file>
 
+<file path=ppt/notesSlides/notesSlide1.xml><?xml version="1.0" encoding="utf-8"?>
+<p:notes xmlns:a="http://schemas.openxmlformats.org/drawingml/2006/main" xmlns:r="http://schemas.openxmlformats.org/officeDocument/2006/relationships" xmlns:p="http://schemas.openxmlformats.org/presentationml/2006/main">
+  <p:cSld>
+    <p:spTree>
+      <p:nvGrpSpPr>
+        <p:cNvPr id="1" name=""/>
+        <p:cNvGrpSpPr/>
+        <p:nvPr/>
+      </p:nvGrpSpPr>
+      <p:grpSpPr>
+        <a:xfrm>
+          <a:off x="0" y="0"/>
+          <a:ext cx="0" cy="0"/>
+          <a:chOff x="0" y="0"/>
+          <a:chExt cx="0" cy="0"/>
+        </a:xfrm>
+      </p:grpSpPr>
+      <p:sp>
+        <p:nvSpPr>
+          <p:cNvPr id="2" name="Slide Image Placeholder 1"/>
+          <p:cNvSpPr>
+            <a:spLocks noGrp="1" noRot="1" noChangeAspect="1"/>
+          </p:cNvSpPr>
+          <p:nvPr>
+            <p:ph type="sldImg"/>
+          </p:nvPr>
+        </p:nvSpPr>
+        <p:spPr/>
+      </p:sp>
+      <p:sp>
+        <p:nvSpPr>
+          <p:cNvPr id="3" name="Notes Placeholder 2"/>
+          <p:cNvSpPr>
+            <a:spLocks noGrp="1"/>
+          </p:cNvSpPr>
+          <p:nvPr>
+            <p:ph type="body" idx="1"/>
+          </p:nvPr>
+        </p:nvSpPr>
+        <p:spPr/>
+        <p:txBody>
+          <a:bodyPr/>
+          <a:lstStyle/>
+          <a:p>
+            <a:r>
+              <a:rPr lang="en-IE" dirty="0"/>
+              <a:t>If you use Mean Absolute Error (MAE) as a loss function, the "optimal" strategy for the model is to predict the </a:t>
+            </a:r>
+            <a:r>
+              <a:rPr lang="en-IE" b="1" dirty="0"/>
+              <a:t>median</a:t>
+            </a:r>
+            <a:r>
+              <a:rPr lang="en-IE" dirty="0"/>
+              <a:t>. If you use Mean Squared Error (MSE), it predicts the </a:t>
+            </a:r>
+            <a:r>
+              <a:rPr lang="en-IE" b="1" dirty="0"/>
+              <a:t>mean</a:t>
+            </a:r>
+            <a:r>
+              <a:rPr lang="en-IE" dirty="0"/>
+              <a:t>. Only proper scoring rules like CRPS force the model to estimate the </a:t>
+            </a:r>
+            <a:r>
+              <a:rPr lang="en-IE" b="1" dirty="0"/>
+              <a:t>entire distribution</a:t>
+            </a:r>
+            <a:r>
+              <a:rPr lang="en-IE" dirty="0"/>
+              <a:t> honestly.</a:t>
+            </a:r>
+            <a:endParaRPr lang="en-US" dirty="0"/>
+          </a:p>
+        </p:txBody>
+      </p:sp>
+      <p:sp>
+        <p:nvSpPr>
+          <p:cNvPr id="4" name="Slide Number Placeholder 3"/>
+          <p:cNvSpPr>
+            <a:spLocks noGrp="1"/>
+          </p:cNvSpPr>
+          <p:nvPr>
+            <p:ph type="sldNum" sz="quarter" idx="5"/>
+          </p:nvPr>
+        </p:nvSpPr>
+        <p:spPr/>
+        <p:txBody>
+          <a:bodyPr/>
+          <a:lstStyle/>
+          <a:p>
+            <a:fld id="{30752F2A-FA59-1746-ABA5-28C394E5ED08}" type="slidenum">
+              <a:rPr lang="en-US" smtClean="0"/>
+              <a:t>4</a:t>
+            </a:fld>
+            <a:endParaRPr lang="en-US"/>
+          </a:p>
+        </p:txBody>
+      </p:sp>
+    </p:spTree>
+    <p:extLst>
+      <p:ext uri="{BB962C8B-B14F-4D97-AF65-F5344CB8AC3E}">
+        <p14:creationId xmlns:p14="http://schemas.microsoft.com/office/powerpoint/2010/main" val="1027432635"/>
+      </p:ext>
+    </p:extLst>
+  </p:cSld>
+  <p:clrMapOvr>
+    <a:masterClrMapping/>
+  </p:clrMapOvr>
+</p:notes>
+</file>
+
+<file path=ppt/notesSlides/notesSlide2.xml><?xml version="1.0" encoding="utf-8"?>
+<p:notes xmlns:a="http://schemas.openxmlformats.org/drawingml/2006/main" xmlns:r="http://schemas.openxmlformats.org/officeDocument/2006/relationships" xmlns:p="http://schemas.openxmlformats.org/presentationml/2006/main">
+  <p:cSld>
+    <p:spTree>
+      <p:nvGrpSpPr>
+        <p:cNvPr id="1" name=""/>
+        <p:cNvGrpSpPr/>
+        <p:nvPr/>
+      </p:nvGrpSpPr>
+      <p:grpSpPr>
+        <a:xfrm>
+          <a:off x="0" y="0"/>
+          <a:ext cx="0" cy="0"/>
+          <a:chOff x="0" y="0"/>
+          <a:chExt cx="0" cy="0"/>
+        </a:xfrm>
+      </p:grpSpPr>
+      <p:sp>
+        <p:nvSpPr>
+          <p:cNvPr id="2" name="Slide Image Placeholder 1"/>
+          <p:cNvSpPr>
+            <a:spLocks noGrp="1" noRot="1" noChangeAspect="1"/>
+          </p:cNvSpPr>
+          <p:nvPr>
+            <p:ph type="sldImg"/>
+          </p:nvPr>
+        </p:nvSpPr>
+        <p:spPr/>
+      </p:sp>
+      <p:sp>
+        <p:nvSpPr>
+          <p:cNvPr id="3" name="Notes Placeholder 2"/>
+          <p:cNvSpPr>
+            <a:spLocks noGrp="1"/>
+          </p:cNvSpPr>
+          <p:nvPr>
+            <p:ph type="body" idx="1"/>
+          </p:nvPr>
+        </p:nvSpPr>
+        <p:spPr/>
+        <p:txBody>
+          <a:bodyPr/>
+          <a:lstStyle/>
+          <a:p>
+            <a:r>
+              <a:rPr lang="en-IE" dirty="0"/>
+              <a:t>Reasoning: </a:t>
+            </a:r>
+            <a:r>
+              <a:rPr lang="en-IE" sz="1200" kern="1200" dirty="0">
+                <a:solidFill>
+                  <a:schemeClr val="tx1"/>
+                </a:solidFill>
+                <a:effectLst/>
+                <a:latin typeface="+mn-lt"/>
+                <a:ea typeface="+mn-ea"/>
+                <a:cs typeface="+mn-cs"/>
+              </a:rPr>
+              <a:t>$(0.5 - 1)^2 = 0.25$</a:t>
+            </a:r>
+            <a:r>
+              <a:rPr lang="en-IE" dirty="0"/>
+              <a:t> and </a:t>
+            </a:r>
+            <a:r>
+              <a:rPr lang="en-IE" sz="1200" kern="1200" dirty="0">
+                <a:solidFill>
+                  <a:schemeClr val="tx1"/>
+                </a:solidFill>
+                <a:effectLst/>
+                <a:latin typeface="+mn-lt"/>
+                <a:ea typeface="+mn-ea"/>
+                <a:cs typeface="+mn-cs"/>
+              </a:rPr>
+              <a:t>$(0.5 - 0)^2 = 0.25$</a:t>
+            </a:r>
+            <a:r>
+              <a:rPr lang="en-IE" dirty="0"/>
+              <a:t>. Since rain happens 50% of the time, the average score is </a:t>
+            </a:r>
+            <a:r>
+              <a:rPr lang="en-IE" sz="1200" kern="1200" dirty="0">
+                <a:solidFill>
+                  <a:schemeClr val="tx1"/>
+                </a:solidFill>
+                <a:effectLst/>
+                <a:latin typeface="+mn-lt"/>
+                <a:ea typeface="+mn-ea"/>
+                <a:cs typeface="+mn-cs"/>
+              </a:rPr>
+              <a:t>$0.25$</a:t>
+            </a:r>
+            <a:r>
+              <a:rPr lang="en-IE" dirty="0"/>
+              <a:t>. This teaches students that a Brier Score can be "okay" while the forecast is still "unsharp" (uninformative).</a:t>
+            </a:r>
+            <a:endParaRPr lang="en-US" dirty="0"/>
+          </a:p>
+        </p:txBody>
+      </p:sp>
+      <p:sp>
+        <p:nvSpPr>
+          <p:cNvPr id="4" name="Slide Number Placeholder 3"/>
+          <p:cNvSpPr>
+            <a:spLocks noGrp="1"/>
+          </p:cNvSpPr>
+          <p:nvPr>
+            <p:ph type="sldNum" sz="quarter" idx="5"/>
+          </p:nvPr>
+        </p:nvSpPr>
+        <p:spPr/>
+        <p:txBody>
+          <a:bodyPr/>
+          <a:lstStyle/>
+          <a:p>
+            <a:fld id="{30752F2A-FA59-1746-ABA5-28C394E5ED08}" type="slidenum">
+              <a:rPr lang="en-US" smtClean="0"/>
+              <a:t>6</a:t>
+            </a:fld>
+            <a:endParaRPr lang="en-US"/>
+          </a:p>
+        </p:txBody>
+      </p:sp>
+    </p:spTree>
+    <p:extLst>
+      <p:ext uri="{BB962C8B-B14F-4D97-AF65-F5344CB8AC3E}">
+        <p14:creationId xmlns:p14="http://schemas.microsoft.com/office/powerpoint/2010/main" val="3558101315"/>
+      </p:ext>
+    </p:extLst>
+  </p:cSld>
+  <p:clrMapOvr>
+    <a:masterClrMapping/>
+  </p:clrMapOvr>
+</p:notes>
+</file>
+
+<file path=ppt/notesSlides/notesSlide3.xml><?xml version="1.0" encoding="utf-8"?>
+<p:notes xmlns:a="http://schemas.openxmlformats.org/drawingml/2006/main" xmlns:r="http://schemas.openxmlformats.org/officeDocument/2006/relationships" xmlns:p="http://schemas.openxmlformats.org/presentationml/2006/main">
+  <p:cSld>
+    <p:spTree>
+      <p:nvGrpSpPr>
+        <p:cNvPr id="1" name=""/>
+        <p:cNvGrpSpPr/>
+        <p:nvPr/>
+      </p:nvGrpSpPr>
+      <p:grpSpPr>
+        <a:xfrm>
+          <a:off x="0" y="0"/>
+          <a:ext cx="0" cy="0"/>
+          <a:chOff x="0" y="0"/>
+          <a:chExt cx="0" cy="0"/>
+        </a:xfrm>
+      </p:grpSpPr>
+      <p:sp>
+        <p:nvSpPr>
+          <p:cNvPr id="2" name="Slide Image Placeholder 1"/>
+          <p:cNvSpPr>
+            <a:spLocks noGrp="1" noRot="1" noChangeAspect="1"/>
+          </p:cNvSpPr>
+          <p:nvPr>
+            <p:ph type="sldImg"/>
+          </p:nvPr>
+        </p:nvSpPr>
+        <p:spPr/>
+      </p:sp>
+      <p:sp>
+        <p:nvSpPr>
+          <p:cNvPr id="3" name="Notes Placeholder 2"/>
+          <p:cNvSpPr>
+            <a:spLocks noGrp="1"/>
+          </p:cNvSpPr>
+          <p:nvPr>
+            <p:ph type="body" idx="1"/>
+          </p:nvPr>
+        </p:nvSpPr>
+        <p:spPr/>
+        <p:txBody>
+          <a:bodyPr/>
+          <a:lstStyle/>
+          <a:p>
+            <a:r>
+              <a:rPr lang="en-US"/>
+              <a:t>Do not modify the notes in this section to avoid tampering with the Poll Everywhere activity.
+More info at polleverywhere.com/support
+Suppose a model always predicts a 50% probability of rain ($$p = 0.5$$) for every single day. If it actually rains on exactly 50% of the days, what is the Brier Score of this model, and what does it reveal about the forecast quality?</a:t>
+            </a:r>
+          </a:p>
+          <a:p>
+            <a:r>
+              <a:rPr lang="en-US"/>
+              <a:t>https://www.polleverywhere.com/multiple_choice_polls/vd3UrKUYILga0TJnv0kQ2?state=opened&amp;flow=Default&amp;onscreen=persist</a:t>
+            </a:r>
+          </a:p>
+        </p:txBody>
+      </p:sp>
+      <p:sp>
+        <p:nvSpPr>
+          <p:cNvPr id="4" name="Slide Number Placeholder 3"/>
+          <p:cNvSpPr>
+            <a:spLocks noGrp="1"/>
+          </p:cNvSpPr>
+          <p:nvPr>
+            <p:ph type="sldNum" sz="quarter" idx="5"/>
+          </p:nvPr>
+        </p:nvSpPr>
+        <p:spPr/>
+        <p:txBody>
+          <a:bodyPr/>
+          <a:lstStyle/>
+          <a:p>
+            <a:fld id="{30752F2A-FA59-1746-ABA5-28C394E5ED08}" type="slidenum">
+              <a:rPr lang="en-US" smtClean="0"/>
+              <a:t>7</a:t>
+            </a:fld>
+            <a:endParaRPr lang="en-US"/>
+          </a:p>
+        </p:txBody>
+      </p:sp>
+    </p:spTree>
+    <p:extLst>
+      <p:ext uri="{BB962C8B-B14F-4D97-AF65-F5344CB8AC3E}">
+        <p14:creationId xmlns:p14="http://schemas.microsoft.com/office/powerpoint/2010/main" val="3123433741"/>
+      </p:ext>
+    </p:extLst>
+  </p:cSld>
+  <p:clrMapOvr>
+    <a:masterClrMapping/>
+  </p:clrMapOvr>
+</p:notes>
+</file>
+
+<file path=ppt/notesSlides/notesSlide4.xml><?xml version="1.0" encoding="utf-8"?>
+<p:notes xmlns:a="http://schemas.openxmlformats.org/drawingml/2006/main" xmlns:r="http://schemas.openxmlformats.org/officeDocument/2006/relationships" xmlns:p="http://schemas.openxmlformats.org/presentationml/2006/main">
+  <p:cSld>
+    <p:spTree>
+      <p:nvGrpSpPr>
+        <p:cNvPr id="1" name=""/>
+        <p:cNvGrpSpPr/>
+        <p:nvPr/>
+      </p:nvGrpSpPr>
+      <p:grpSpPr>
+        <a:xfrm>
+          <a:off x="0" y="0"/>
+          <a:ext cx="0" cy="0"/>
+          <a:chOff x="0" y="0"/>
+          <a:chExt cx="0" cy="0"/>
+        </a:xfrm>
+      </p:grpSpPr>
+      <p:sp>
+        <p:nvSpPr>
+          <p:cNvPr id="2" name="Slide Image Placeholder 1"/>
+          <p:cNvSpPr>
+            <a:spLocks noGrp="1" noRot="1" noChangeAspect="1"/>
+          </p:cNvSpPr>
+          <p:nvPr>
+            <p:ph type="sldImg"/>
+          </p:nvPr>
+        </p:nvSpPr>
+        <p:spPr/>
+      </p:sp>
+      <p:sp>
+        <p:nvSpPr>
+          <p:cNvPr id="3" name="Notes Placeholder 2"/>
+          <p:cNvSpPr>
+            <a:spLocks noGrp="1"/>
+          </p:cNvSpPr>
+          <p:nvPr>
+            <p:ph type="body" idx="1"/>
+          </p:nvPr>
+        </p:nvSpPr>
+        <p:spPr/>
+        <p:txBody>
+          <a:bodyPr/>
+          <a:lstStyle/>
+          <a:p>
+            <a:r>
+              <a:rPr lang="en-US"/>
+              <a:t>Do not modify the notes in this section to avoid tampering with the Poll Everywhere activity.
+More info at polleverywhere.com/support
+The CRPS is often described as a generalisation of the Mean Absolute Error (MAE). If a model provides a perfectly "sharp" deterministic forecast (where the standard deviation $$\sigma$$ is zero), what does the CRPS value become?</a:t>
+            </a:r>
+          </a:p>
+          <a:p>
+            <a:r>
+              <a:rPr lang="en-US"/>
+              <a:t>https://www.polleverywhere.com/multiple_choice_polls/P3B4HihRUR32bagwfF4v6?state=opened&amp;flow=Default&amp;onscreen=persist</a:t>
+            </a:r>
+          </a:p>
+        </p:txBody>
+      </p:sp>
+      <p:sp>
+        <p:nvSpPr>
+          <p:cNvPr id="4" name="Slide Number Placeholder 3"/>
+          <p:cNvSpPr>
+            <a:spLocks noGrp="1"/>
+          </p:cNvSpPr>
+          <p:nvPr>
+            <p:ph type="sldNum" sz="quarter" idx="5"/>
+          </p:nvPr>
+        </p:nvSpPr>
+        <p:spPr/>
+        <p:txBody>
+          <a:bodyPr/>
+          <a:lstStyle/>
+          <a:p>
+            <a:fld id="{30752F2A-FA59-1746-ABA5-28C394E5ED08}" type="slidenum">
+              <a:rPr lang="en-US" smtClean="0"/>
+              <a:t>10</a:t>
+            </a:fld>
+            <a:endParaRPr lang="en-US"/>
+          </a:p>
+        </p:txBody>
+      </p:sp>
+    </p:spTree>
+    <p:extLst>
+      <p:ext uri="{BB962C8B-B14F-4D97-AF65-F5344CB8AC3E}">
+        <p14:creationId xmlns:p14="http://schemas.microsoft.com/office/powerpoint/2010/main" val="161037228"/>
+      </p:ext>
+    </p:extLst>
+  </p:cSld>
+  <p:clrMapOvr>
+    <a:masterClrMapping/>
+  </p:clrMapOvr>
+</p:notes>
+</file>
+
 <file path=ppt/slideLayouts/slideLayout1.xml><?xml version="1.0" encoding="utf-8"?>
 <p:sldLayout xmlns:a="http://schemas.openxmlformats.org/drawingml/2006/main" xmlns:r="http://schemas.openxmlformats.org/officeDocument/2006/relationships" xmlns:p="http://schemas.openxmlformats.org/presentationml/2006/main" preserve="1" userDrawn="1">
   <p:cSld name="Title Slide Colour">
@@ -1745,7 +2185,7 @@
           <a:p>
             <a:fld id="{D7043C3A-33ED-42EC-99E6-B5FE9049A83B}" type="datetime3">
               <a:rPr lang="en-IE" smtClean="0"/>
-              <a:t>8 October 2025</a:t>
+              <a:t>20 February 2026</a:t>
             </a:fld>
             <a:endParaRPr lang="en-US" dirty="0"/>
           </a:p>
@@ -2456,6 +2896,199 @@
 </p:sldLayout>
 </file>
 
+<file path=ppt/slideLayouts/slideLayout13.xml><?xml version="1.0" encoding="utf-8"?>
+<p:sldLayout xmlns:a="http://schemas.openxmlformats.org/drawingml/2006/main" xmlns:r="http://schemas.openxmlformats.org/officeDocument/2006/relationships" xmlns:p="http://schemas.openxmlformats.org/presentationml/2006/main" type="title" preserve="1">
+  <p:cSld name="1_Title Slide">
+    <p:spTree>
+      <p:nvGrpSpPr>
+        <p:cNvPr id="1" name=""/>
+        <p:cNvGrpSpPr/>
+        <p:nvPr/>
+      </p:nvGrpSpPr>
+      <p:grpSpPr>
+        <a:xfrm>
+          <a:off x="0" y="0"/>
+          <a:ext cx="0" cy="0"/>
+          <a:chOff x="0" y="0"/>
+          <a:chExt cx="0" cy="0"/>
+        </a:xfrm>
+      </p:grpSpPr>
+      <p:sp>
+        <p:nvSpPr>
+          <p:cNvPr id="2" name="Title 1">
+            <a:extLst>
+              <a:ext uri="{FF2B5EF4-FFF2-40B4-BE49-F238E27FC236}">
+                <a16:creationId xmlns:a16="http://schemas.microsoft.com/office/drawing/2014/main" id="{48FF8EE0-63FD-90C7-A8F6-6E35CF63883A}"/>
+              </a:ext>
+            </a:extLst>
+          </p:cNvPr>
+          <p:cNvSpPr>
+            <a:spLocks noGrp="1"/>
+          </p:cNvSpPr>
+          <p:nvPr>
+            <p:ph type="ctrTitle"/>
+          </p:nvPr>
+        </p:nvSpPr>
+        <p:spPr>
+          <a:xfrm>
+            <a:off x="1524000" y="1122363"/>
+            <a:ext cx="9144000" cy="2387600"/>
+          </a:xfrm>
+        </p:spPr>
+        <p:txBody>
+          <a:bodyPr anchor="b"/>
+          <a:lstStyle>
+            <a:lvl1pPr algn="ctr">
+              <a:defRPr sz="6000"/>
+            </a:lvl1pPr>
+          </a:lstStyle>
+          <a:p>
+            <a:r>
+              <a:rPr lang="en-GB"/>
+              <a:t>Click to edit Master title style</a:t>
+            </a:r>
+            <a:endParaRPr lang="en-US"/>
+          </a:p>
+        </p:txBody>
+      </p:sp>
+      <p:sp>
+        <p:nvSpPr>
+          <p:cNvPr id="3" name="Subtitle 2">
+            <a:extLst>
+              <a:ext uri="{FF2B5EF4-FFF2-40B4-BE49-F238E27FC236}">
+                <a16:creationId xmlns:a16="http://schemas.microsoft.com/office/drawing/2014/main" id="{4F6B8AAD-E381-9F48-3A73-7ED346C37833}"/>
+              </a:ext>
+            </a:extLst>
+          </p:cNvPr>
+          <p:cNvSpPr>
+            <a:spLocks noGrp="1"/>
+          </p:cNvSpPr>
+          <p:nvPr>
+            <p:ph type="subTitle" idx="1"/>
+          </p:nvPr>
+        </p:nvSpPr>
+        <p:spPr>
+          <a:xfrm>
+            <a:off x="1524000" y="3602038"/>
+            <a:ext cx="9144000" cy="1655762"/>
+          </a:xfrm>
+        </p:spPr>
+        <p:txBody>
+          <a:bodyPr/>
+          <a:lstStyle>
+            <a:lvl1pPr marL="0" indent="0" algn="ctr">
+              <a:buNone/>
+              <a:defRPr sz="2400"/>
+            </a:lvl1pPr>
+            <a:lvl2pPr marL="457200" indent="0" algn="ctr">
+              <a:buNone/>
+              <a:defRPr sz="2000"/>
+            </a:lvl2pPr>
+            <a:lvl3pPr marL="914400" indent="0" algn="ctr">
+              <a:buNone/>
+              <a:defRPr sz="1800"/>
+            </a:lvl3pPr>
+            <a:lvl4pPr marL="1371600" indent="0" algn="ctr">
+              <a:buNone/>
+              <a:defRPr sz="1600"/>
+            </a:lvl4pPr>
+            <a:lvl5pPr marL="1828800" indent="0" algn="ctr">
+              <a:buNone/>
+              <a:defRPr sz="1600"/>
+            </a:lvl5pPr>
+            <a:lvl6pPr marL="2286000" indent="0" algn="ctr">
+              <a:buNone/>
+              <a:defRPr sz="1600"/>
+            </a:lvl6pPr>
+            <a:lvl7pPr marL="2743200" indent="0" algn="ctr">
+              <a:buNone/>
+              <a:defRPr sz="1600"/>
+            </a:lvl7pPr>
+            <a:lvl8pPr marL="3200400" indent="0" algn="ctr">
+              <a:buNone/>
+              <a:defRPr sz="1600"/>
+            </a:lvl8pPr>
+            <a:lvl9pPr marL="3657600" indent="0" algn="ctr">
+              <a:buNone/>
+              <a:defRPr sz="1600"/>
+            </a:lvl9pPr>
+          </a:lstStyle>
+          <a:p>
+            <a:r>
+              <a:rPr lang="en-GB"/>
+              <a:t>Click to edit Master subtitle style</a:t>
+            </a:r>
+            <a:endParaRPr lang="en-US"/>
+          </a:p>
+        </p:txBody>
+      </p:sp>
+      <p:sp>
+        <p:nvSpPr>
+          <p:cNvPr id="4" name="Footer Placeholder 3">
+            <a:extLst>
+              <a:ext uri="{FF2B5EF4-FFF2-40B4-BE49-F238E27FC236}">
+                <a16:creationId xmlns:a16="http://schemas.microsoft.com/office/drawing/2014/main" id="{9F50F77C-8225-FE1C-8BCF-98C1B4A28CF0}"/>
+              </a:ext>
+            </a:extLst>
+          </p:cNvPr>
+          <p:cNvSpPr>
+            <a:spLocks noGrp="1"/>
+          </p:cNvSpPr>
+          <p:nvPr>
+            <p:ph type="ftr" sz="quarter" idx="10"/>
+          </p:nvPr>
+        </p:nvSpPr>
+        <p:spPr/>
+        <p:txBody>
+          <a:bodyPr/>
+          <a:lstStyle/>
+          <a:p>
+            <a:endParaRPr lang="en-US" dirty="0"/>
+          </a:p>
+        </p:txBody>
+      </p:sp>
+      <p:sp>
+        <p:nvSpPr>
+          <p:cNvPr id="5" name="Slide Number Placeholder 4">
+            <a:extLst>
+              <a:ext uri="{FF2B5EF4-FFF2-40B4-BE49-F238E27FC236}">
+                <a16:creationId xmlns:a16="http://schemas.microsoft.com/office/drawing/2014/main" id="{9877CDB0-0156-39D4-AA59-E150060B2FCB}"/>
+              </a:ext>
+            </a:extLst>
+          </p:cNvPr>
+          <p:cNvSpPr>
+            <a:spLocks noGrp="1"/>
+          </p:cNvSpPr>
+          <p:nvPr>
+            <p:ph type="sldNum" sz="quarter" idx="11"/>
+          </p:nvPr>
+        </p:nvSpPr>
+        <p:spPr/>
+        <p:txBody>
+          <a:bodyPr/>
+          <a:lstStyle/>
+          <a:p>
+            <a:fld id="{5A064C77-022D-3743-A04E-645624933D1D}" type="slidenum">
+              <a:rPr lang="en-US" smtClean="0"/>
+              <a:t>‹#›</a:t>
+            </a:fld>
+            <a:endParaRPr lang="en-US"/>
+          </a:p>
+        </p:txBody>
+      </p:sp>
+    </p:spTree>
+    <p:extLst>
+      <p:ext uri="{BB962C8B-B14F-4D97-AF65-F5344CB8AC3E}">
+        <p14:creationId xmlns:p14="http://schemas.microsoft.com/office/powerpoint/2010/main" val="915230466"/>
+      </p:ext>
+    </p:extLst>
+  </p:cSld>
+  <p:clrMapOvr>
+    <a:masterClrMapping/>
+  </p:clrMapOvr>
+</p:sldLayout>
+</file>
+
 <file path=ppt/slideLayouts/slideLayout2.xml><?xml version="1.0" encoding="utf-8"?>
 <p:sldLayout xmlns:a="http://schemas.openxmlformats.org/drawingml/2006/main" xmlns:r="http://schemas.openxmlformats.org/officeDocument/2006/relationships" xmlns:p="http://schemas.openxmlformats.org/presentationml/2006/main" preserve="1" userDrawn="1">
   <p:cSld name="Title Slide">
@@ -2602,7 +3235,7 @@
           <a:p>
             <a:fld id="{A20550B1-742F-4033-AAB7-DC28BBBCACAB}" type="datetime3">
               <a:rPr lang="en-IE" smtClean="0"/>
-              <a:t>8 October 2025</a:t>
+              <a:t>20 February 2026</a:t>
             </a:fld>
             <a:endParaRPr lang="en-US" dirty="0"/>
           </a:p>
@@ -2879,7 +3512,7 @@
           <a:p>
             <a:fld id="{F1E91F8A-F806-4B78-A2A3-404C465D9606}" type="datetime3">
               <a:rPr lang="en-IE" smtClean="0"/>
-              <a:t>8 October 2025</a:t>
+              <a:t>20 February 2026</a:t>
             </a:fld>
             <a:endParaRPr lang="en-US" dirty="0"/>
           </a:p>
@@ -3946,7 +4579,7 @@
     <p:bg>
       <p:bgPr>
         <a:blipFill dpi="0" rotWithShape="1">
-          <a:blip r:embed="rId14">
+          <a:blip r:embed="rId15">
             <a:lum/>
           </a:blip>
           <a:srcRect/>
@@ -4189,6 +4822,7 @@
     <p:sldLayoutId id="2147483664" r:id="rId10"/>
     <p:sldLayoutId id="2147483665" r:id="rId11"/>
     <p:sldLayoutId id="2147483666" r:id="rId12"/>
+    <p:sldLayoutId id="2147483667" r:id="rId13"/>
   </p:sldLayoutIdLst>
   <p:hf hdr="0" ftr="0" dt="0"/>
   <p:txStyles>
@@ -4561,6 +5195,584 @@
           <p:cNvPr id="2" name="Title 1">
             <a:extLst>
               <a:ext uri="{FF2B5EF4-FFF2-40B4-BE49-F238E27FC236}">
+                <a16:creationId xmlns:a16="http://schemas.microsoft.com/office/drawing/2014/main" id="{8ADB3426-D4E6-431E-BEDB-CEAC1B574B70}"/>
+              </a:ext>
+            </a:extLst>
+          </p:cNvPr>
+          <p:cNvSpPr>
+            <a:spLocks noGrp="1"/>
+          </p:cNvSpPr>
+          <p:nvPr>
+            <p:ph type="ctrTitle"/>
+          </p:nvPr>
+        </p:nvSpPr>
+        <p:spPr/>
+        <p:txBody>
+          <a:bodyPr/>
+          <a:lstStyle/>
+          <a:p>
+            <a:endParaRPr lang="en-US"/>
+          </a:p>
+        </p:txBody>
+      </p:sp>
+      <p:sp>
+        <p:nvSpPr>
+          <p:cNvPr id="3" name="Subtitle 2">
+            <a:extLst>
+              <a:ext uri="{FF2B5EF4-FFF2-40B4-BE49-F238E27FC236}">
+                <a16:creationId xmlns:a16="http://schemas.microsoft.com/office/drawing/2014/main" id="{C705F06D-36F9-B349-F318-D93CFCAA63F0}"/>
+              </a:ext>
+            </a:extLst>
+          </p:cNvPr>
+          <p:cNvSpPr>
+            <a:spLocks noGrp="1"/>
+          </p:cNvSpPr>
+          <p:nvPr>
+            <p:ph type="subTitle" idx="1"/>
+          </p:nvPr>
+        </p:nvSpPr>
+        <p:spPr/>
+        <p:txBody>
+          <a:bodyPr/>
+          <a:lstStyle/>
+          <a:p>
+            <a:endParaRPr lang="en-US"/>
+          </a:p>
+        </p:txBody>
+      </p:sp>
+      <p:sp>
+        <p:nvSpPr>
+          <p:cNvPr id="4" name="Slide Number Placeholder 3">
+            <a:extLst>
+              <a:ext uri="{FF2B5EF4-FFF2-40B4-BE49-F238E27FC236}">
+                <a16:creationId xmlns:a16="http://schemas.microsoft.com/office/drawing/2014/main" id="{0DF82EB5-5E9B-3DB8-6D21-0CB375ECF72A}"/>
+              </a:ext>
+            </a:extLst>
+          </p:cNvPr>
+          <p:cNvSpPr>
+            <a:spLocks noGrp="1"/>
+          </p:cNvSpPr>
+          <p:nvPr>
+            <p:ph type="sldNum" sz="quarter" idx="11"/>
+          </p:nvPr>
+        </p:nvSpPr>
+        <p:spPr/>
+        <p:txBody>
+          <a:bodyPr/>
+          <a:lstStyle/>
+          <a:p>
+            <a:fld id="{5A064C77-022D-3743-A04E-645624933D1D}" type="slidenum">
+              <a:rPr lang="en-US" smtClean="0"/>
+              <a:t>10</a:t>
+            </a:fld>
+            <a:endParaRPr lang="en-US"/>
+          </a:p>
+        </p:txBody>
+      </p:sp>
+      <p:pic>
+        <p:nvPicPr>
+          <p:cNvPr id="6" name="slide.url=https://www.polleverywhere.com/multiple_choice_polls/P3B4HihRUR32bagwfF4v6?state=opened&amp;flow=Default&amp;onscreen=persist">
+            <a:extLst>
+              <a:ext uri="{FF2B5EF4-FFF2-40B4-BE49-F238E27FC236}">
+                <a16:creationId xmlns:a16="http://schemas.microsoft.com/office/drawing/2014/main" id="{A9C2E504-683B-CB47-464F-FC71A194AF74}"/>
+              </a:ext>
+            </a:extLst>
+          </p:cNvPr>
+          <p:cNvPicPr>
+            <a:picLocks/>
+          </p:cNvPicPr>
+          <p:nvPr/>
+        </p:nvPicPr>
+        <p:blipFill>
+          <a:blip r:embed="rId3"/>
+          <a:stretch>
+            <a:fillRect/>
+          </a:stretch>
+        </p:blipFill>
+        <p:spPr>
+          <a:xfrm>
+            <a:off x="63500" y="63500"/>
+            <a:ext cx="12065000" cy="6731000"/>
+          </a:xfrm>
+          <a:prstGeom prst="rect">
+            <a:avLst/>
+          </a:prstGeom>
+        </p:spPr>
+      </p:pic>
+    </p:spTree>
+    <p:extLst>
+      <p:ext uri="{BB962C8B-B14F-4D97-AF65-F5344CB8AC3E}">
+        <p14:creationId xmlns:p14="http://schemas.microsoft.com/office/powerpoint/2010/main" val="98645258"/>
+      </p:ext>
+    </p:extLst>
+  </p:cSld>
+  <p:clrMapOvr>
+    <a:masterClrMapping/>
+  </p:clrMapOvr>
+</p:sld>
+</file>
+
+<file path=ppt/slides/slide11.xml><?xml version="1.0" encoding="utf-8"?>
+<p:sld xmlns:a="http://schemas.openxmlformats.org/drawingml/2006/main" xmlns:r="http://schemas.openxmlformats.org/officeDocument/2006/relationships" xmlns:p="http://schemas.openxmlformats.org/presentationml/2006/main">
+  <p:cSld>
+    <p:spTree>
+      <p:nvGrpSpPr>
+        <p:cNvPr id="1" name=""/>
+        <p:cNvGrpSpPr/>
+        <p:nvPr/>
+      </p:nvGrpSpPr>
+      <p:grpSpPr>
+        <a:xfrm>
+          <a:off x="0" y="0"/>
+          <a:ext cx="0" cy="0"/>
+          <a:chOff x="0" y="0"/>
+          <a:chExt cx="0" cy="0"/>
+        </a:xfrm>
+      </p:grpSpPr>
+      <p:sp>
+        <p:nvSpPr>
+          <p:cNvPr id="2" name="Title 1">
+            <a:extLst>
+              <a:ext uri="{FF2B5EF4-FFF2-40B4-BE49-F238E27FC236}">
+                <a16:creationId xmlns:a16="http://schemas.microsoft.com/office/drawing/2014/main" id="{D1A96095-CD8A-4D90-90FC-FA4C837EDD86}"/>
+              </a:ext>
+            </a:extLst>
+          </p:cNvPr>
+          <p:cNvSpPr>
+            <a:spLocks noGrp="1"/>
+          </p:cNvSpPr>
+          <p:nvPr>
+            <p:ph type="title"/>
+          </p:nvPr>
+        </p:nvSpPr>
+        <p:spPr/>
+        <p:txBody>
+          <a:bodyPr>
+            <a:normAutofit/>
+          </a:bodyPr>
+          <a:lstStyle/>
+          <a:p>
+            <a:r>
+              <a:rPr lang="en-US" dirty="0"/>
+              <a:t>Probabilistic Output Layers</a:t>
+            </a:r>
+          </a:p>
+        </p:txBody>
+      </p:sp>
+      <mc:AlternateContent xmlns:mc="http://schemas.openxmlformats.org/markup-compatibility/2006" xmlns:a14="http://schemas.microsoft.com/office/drawing/2010/main">
+        <mc:Choice Requires="a14">
+          <p:sp>
+            <p:nvSpPr>
+              <p:cNvPr id="3" name="Content Placeholder 2">
+                <a:extLst>
+                  <a:ext uri="{FF2B5EF4-FFF2-40B4-BE49-F238E27FC236}">
+                    <a16:creationId xmlns:a16="http://schemas.microsoft.com/office/drawing/2014/main" id="{002E4312-FB78-2B38-8E70-759BE6ABE724}"/>
+                  </a:ext>
+                </a:extLst>
+              </p:cNvPr>
+              <p:cNvSpPr>
+                <a:spLocks noGrp="1"/>
+              </p:cNvSpPr>
+              <p:nvPr>
+                <p:ph idx="1"/>
+              </p:nvPr>
+            </p:nvSpPr>
+            <p:spPr/>
+            <p:txBody>
+              <a:bodyPr>
+                <a:normAutofit/>
+              </a:bodyPr>
+              <a:lstStyle/>
+              <a:p>
+                <a:r>
+                  <a:rPr lang="en-US" dirty="0"/>
+                  <a:t>Use a proper scoring rule as the loss function</a:t>
+                </a:r>
+              </a:p>
+              <a:p>
+                <a:r>
+                  <a:rPr lang="en-US" dirty="0"/>
+                  <a:t>For Gaussian outputs: the NN outputs e.g. </a:t>
+                </a:r>
+                <a14:m>
+                  <m:oMath xmlns:m="http://schemas.openxmlformats.org/officeDocument/2006/math">
+                    <m:r>
+                      <a:rPr lang="en-US" i="1" dirty="0" smtClean="0">
+                        <a:latin typeface="Cambria Math" panose="02040503050406030204" pitchFamily="18" charset="0"/>
+                      </a:rPr>
+                      <m:t>𝜇</m:t>
+                    </m:r>
+                  </m:oMath>
+                </a14:m>
+                <a:r>
+                  <a:rPr lang="en-US" dirty="0"/>
+                  <a:t> and </a:t>
+                </a:r>
+                <a14:m>
+                  <m:oMath xmlns:m="http://schemas.openxmlformats.org/officeDocument/2006/math">
+                    <m:r>
+                      <a:rPr lang="en-IE" b="0" i="1" dirty="0" smtClean="0">
+                        <a:latin typeface="Cambria Math" panose="02040503050406030204" pitchFamily="18" charset="0"/>
+                      </a:rPr>
+                      <m:t>𝑠𝑜𝑓𝑡𝑝𝑙𝑢𝑠</m:t>
+                    </m:r>
+                    <m:r>
+                      <a:rPr lang="en-IE" b="0" i="1" dirty="0" smtClean="0">
+                        <a:latin typeface="Cambria Math" panose="02040503050406030204" pitchFamily="18" charset="0"/>
+                      </a:rPr>
+                      <m:t>(</m:t>
+                    </m:r>
+                    <m:r>
+                      <a:rPr lang="en-US" i="1" dirty="0" smtClean="0">
+                        <a:latin typeface="Cambria Math" panose="02040503050406030204" pitchFamily="18" charset="0"/>
+                      </a:rPr>
+                      <m:t>𝜎</m:t>
+                    </m:r>
+                    <m:r>
+                      <a:rPr lang="en-IE" b="0" i="1" dirty="0" smtClean="0">
+                        <a:latin typeface="Cambria Math" panose="02040503050406030204" pitchFamily="18" charset="0"/>
+                      </a:rPr>
+                      <m:t>)</m:t>
+                    </m:r>
+                  </m:oMath>
+                </a14:m>
+                <a:r>
+                  <a:rPr lang="en-US" dirty="0"/>
+                  <a:t> so that </a:t>
+                </a:r>
+                <a14:m>
+                  <m:oMath xmlns:m="http://schemas.openxmlformats.org/officeDocument/2006/math">
+                    <m:r>
+                      <a:rPr lang="en-US" i="1" dirty="0" smtClean="0">
+                        <a:latin typeface="Cambria Math" panose="02040503050406030204" pitchFamily="18" charset="0"/>
+                      </a:rPr>
+                      <m:t>𝜎</m:t>
+                    </m:r>
+                    <m:r>
+                      <a:rPr lang="en-US" i="1" dirty="0" smtClean="0">
+                        <a:latin typeface="Cambria Math" panose="02040503050406030204" pitchFamily="18" charset="0"/>
+                      </a:rPr>
+                      <m:t> =</m:t>
+                    </m:r>
+                  </m:oMath>
+                </a14:m>
+                <a:r>
+                  <a:rPr lang="en-US" dirty="0"/>
+                  <a:t> </a:t>
+                </a:r>
+                <a14:m>
+                  <m:oMath xmlns:m="http://schemas.openxmlformats.org/officeDocument/2006/math">
+                    <m:r>
+                      <m:rPr>
+                        <m:sty m:val="p"/>
+                      </m:rPr>
+                      <a:rPr lang="en-US" i="1" dirty="0">
+                        <a:latin typeface="Cambria Math" panose="02040503050406030204" pitchFamily="18" charset="0"/>
+                      </a:rPr>
+                      <m:t>log</m:t>
+                    </m:r>
+                    <m:r>
+                      <a:rPr lang="en-IE" i="1" dirty="0">
+                        <a:latin typeface="Cambria Math" panose="02040503050406030204" pitchFamily="18" charset="0"/>
+                      </a:rPr>
+                      <m:t>(1+</m:t>
+                    </m:r>
+                    <m:sSup>
+                      <m:sSupPr>
+                        <m:ctrlPr>
+                          <a:rPr lang="en-IE" i="1" dirty="0">
+                            <a:latin typeface="Cambria Math" panose="02040503050406030204" pitchFamily="18" charset="0"/>
+                          </a:rPr>
+                        </m:ctrlPr>
+                      </m:sSupPr>
+                      <m:e>
+                        <m:r>
+                          <a:rPr lang="en-IE" i="1" dirty="0">
+                            <a:latin typeface="Cambria Math" panose="02040503050406030204" pitchFamily="18" charset="0"/>
+                          </a:rPr>
+                          <m:t>𝑒</m:t>
+                        </m:r>
+                      </m:e>
+                      <m:sup>
+                        <m:acc>
+                          <m:accPr>
+                            <m:chr m:val="̂"/>
+                            <m:ctrlPr>
+                              <a:rPr lang="en-IE" i="1" dirty="0">
+                                <a:latin typeface="Cambria Math" panose="02040503050406030204" pitchFamily="18" charset="0"/>
+                              </a:rPr>
+                            </m:ctrlPr>
+                          </m:accPr>
+                          <m:e>
+                            <m:r>
+                              <a:rPr lang="en-IE" i="1" dirty="0">
+                                <a:latin typeface="Cambria Math" panose="02040503050406030204" pitchFamily="18" charset="0"/>
+                              </a:rPr>
+                              <m:t>𝑦</m:t>
+                            </m:r>
+                          </m:e>
+                        </m:acc>
+                      </m:sup>
+                    </m:sSup>
+                    <m:r>
+                      <a:rPr lang="en-IE" i="1" dirty="0">
+                        <a:latin typeface="Cambria Math" panose="02040503050406030204" pitchFamily="18" charset="0"/>
+                      </a:rPr>
+                      <m:t>)</m:t>
+                    </m:r>
+                  </m:oMath>
+                </a14:m>
+                <a:endParaRPr lang="en-US" dirty="0"/>
+              </a:p>
+              <a:p>
+                <a:r>
+                  <a:rPr lang="en-US" dirty="0"/>
+                  <a:t>Negative log-likelihood (NLL) loss = </a:t>
+                </a:r>
+                <a14:m>
+                  <m:oMath xmlns:m="http://schemas.openxmlformats.org/officeDocument/2006/math">
+                    <m:r>
+                      <a:rPr lang="en-US" i="1" dirty="0" smtClean="0">
+                        <a:latin typeface="Cambria Math" panose="02040503050406030204" pitchFamily="18" charset="0"/>
+                      </a:rPr>
+                      <m:t>0.5 </m:t>
+                    </m:r>
+                    <m:sSup>
+                      <m:sSupPr>
+                        <m:ctrlPr>
+                          <a:rPr lang="en-US" i="1" dirty="0" smtClean="0">
+                            <a:latin typeface="Cambria Math" panose="02040503050406030204" pitchFamily="18" charset="0"/>
+                          </a:rPr>
+                        </m:ctrlPr>
+                      </m:sSupPr>
+                      <m:e>
+                        <m:d>
+                          <m:dPr>
+                            <m:ctrlPr>
+                              <a:rPr lang="en-US" i="1" dirty="0" smtClean="0">
+                                <a:latin typeface="Cambria Math" panose="02040503050406030204" pitchFamily="18" charset="0"/>
+                              </a:rPr>
+                            </m:ctrlPr>
+                          </m:dPr>
+                          <m:e>
+                            <m:f>
+                              <m:fPr>
+                                <m:ctrlPr>
+                                  <a:rPr lang="en-US" i="1" dirty="0" smtClean="0">
+                                    <a:latin typeface="Cambria Math" panose="02040503050406030204" pitchFamily="18" charset="0"/>
+                                  </a:rPr>
+                                </m:ctrlPr>
+                              </m:fPr>
+                              <m:num>
+                                <m:r>
+                                  <a:rPr lang="en-US" i="1" dirty="0" smtClean="0">
+                                    <a:latin typeface="Cambria Math" panose="02040503050406030204" pitchFamily="18" charset="0"/>
+                                  </a:rPr>
+                                  <m:t>𝑦</m:t>
+                                </m:r>
+                                <m:r>
+                                  <a:rPr lang="en-US" i="1" dirty="0" smtClean="0">
+                                    <a:latin typeface="Cambria Math" panose="02040503050406030204" pitchFamily="18" charset="0"/>
+                                  </a:rPr>
+                                  <m:t>−</m:t>
+                                </m:r>
+                                <m:r>
+                                  <a:rPr lang="en-IE" b="0" i="1" dirty="0" smtClean="0">
+                                    <a:latin typeface="Cambria Math" panose="02040503050406030204" pitchFamily="18" charset="0"/>
+                                  </a:rPr>
+                                  <m:t>𝜇</m:t>
+                                </m:r>
+                              </m:num>
+                              <m:den>
+                                <m:r>
+                                  <a:rPr lang="en-IE" b="0" i="1" dirty="0" smtClean="0">
+                                    <a:latin typeface="Cambria Math" panose="02040503050406030204" pitchFamily="18" charset="0"/>
+                                  </a:rPr>
+                                  <m:t>𝜎</m:t>
+                                </m:r>
+                              </m:den>
+                            </m:f>
+                          </m:e>
+                        </m:d>
+                      </m:e>
+                      <m:sup>
+                        <m:r>
+                          <a:rPr lang="en-IE" b="0" i="1" dirty="0" smtClean="0">
+                            <a:latin typeface="Cambria Math" panose="02040503050406030204" pitchFamily="18" charset="0"/>
+                          </a:rPr>
+                          <m:t>2</m:t>
+                        </m:r>
+                      </m:sup>
+                    </m:sSup>
+                    <m:r>
+                      <a:rPr lang="en-US" i="1" dirty="0" smtClean="0">
+                        <a:latin typeface="Cambria Math" panose="02040503050406030204" pitchFamily="18" charset="0"/>
+                      </a:rPr>
+                      <m:t> +</m:t>
+                    </m:r>
+                    <m:r>
+                      <a:rPr lang="en-IE" b="0" i="1" dirty="0" smtClean="0">
+                        <a:latin typeface="Cambria Math" panose="02040503050406030204" pitchFamily="18" charset="0"/>
+                      </a:rPr>
+                      <m:t>𝑙𝑜𝑔</m:t>
+                    </m:r>
+                    <m:r>
+                      <a:rPr lang="en-US" i="1" dirty="0" smtClean="0">
+                        <a:latin typeface="Cambria Math" panose="02040503050406030204" pitchFamily="18" charset="0"/>
+                      </a:rPr>
+                      <m:t>⁡</m:t>
+                    </m:r>
+                    <m:r>
+                      <a:rPr lang="en-IE" b="0" i="1" dirty="0" smtClean="0">
+                        <a:latin typeface="Cambria Math" panose="02040503050406030204" pitchFamily="18" charset="0"/>
+                      </a:rPr>
+                      <m:t>𝜎</m:t>
+                    </m:r>
+                    <m:r>
+                      <a:rPr lang="en-US" i="1" dirty="0" smtClean="0">
+                        <a:latin typeface="Cambria Math" panose="02040503050406030204" pitchFamily="18" charset="0"/>
+                      </a:rPr>
+                      <m:t> + </m:t>
+                    </m:r>
+                    <m:r>
+                      <a:rPr lang="en-US" i="1" dirty="0" smtClean="0">
+                        <a:latin typeface="Cambria Math" panose="02040503050406030204" pitchFamily="18" charset="0"/>
+                      </a:rPr>
+                      <m:t>𝑐𝑜𝑛𝑠𝑡</m:t>
+                    </m:r>
+                  </m:oMath>
+                </a14:m>
+                <a:endParaRPr lang="en-US" dirty="0"/>
+              </a:p>
+              <a:p>
+                <a:r>
+                  <a:rPr lang="en-US" dirty="0"/>
+                  <a:t>CRPS loss can be computed in closed form for Gaussian distributions</a:t>
+                </a:r>
+              </a:p>
+              <a:p>
+                <a:r>
+                  <a:rPr lang="en-US" dirty="0">
+                    <a:solidFill>
+                      <a:srgbClr val="009749"/>
+                    </a:solidFill>
+                  </a:rPr>
+                  <a:t>Go through forward pass on the board</a:t>
+                </a:r>
+              </a:p>
+              <a:p>
+                <a:pPr marL="0" indent="0">
+                  <a:buNone/>
+                </a:pPr>
+                <a:endParaRPr lang="en-US" dirty="0"/>
+              </a:p>
+            </p:txBody>
+          </p:sp>
+        </mc:Choice>
+        <mc:Fallback xmlns="">
+          <p:sp>
+            <p:nvSpPr>
+              <p:cNvPr id="3" name="Content Placeholder 2">
+                <a:extLst>
+                  <a:ext uri="{FF2B5EF4-FFF2-40B4-BE49-F238E27FC236}">
+                    <a16:creationId xmlns:a16="http://schemas.microsoft.com/office/drawing/2014/main" id="{002E4312-FB78-2B38-8E70-759BE6ABE724}"/>
+                  </a:ext>
+                </a:extLst>
+              </p:cNvPr>
+              <p:cNvSpPr>
+                <a:spLocks noGrp="1" noRot="1" noChangeAspect="1" noMove="1" noResize="1" noEditPoints="1" noAdjustHandles="1" noChangeArrowheads="1" noChangeShapeType="1" noTextEdit="1"/>
+              </p:cNvSpPr>
+              <p:nvPr>
+                <p:ph idx="1"/>
+              </p:nvPr>
+            </p:nvSpPr>
+            <p:spPr>
+              <a:blipFill>
+                <a:blip r:embed="rId2"/>
+                <a:stretch>
+                  <a:fillRect l="-1368" t="-2439"/>
+                </a:stretch>
+              </a:blipFill>
+            </p:spPr>
+            <p:txBody>
+              <a:bodyPr/>
+              <a:lstStyle/>
+              <a:p>
+                <a:r>
+                  <a:rPr lang="en-US">
+                    <a:noFill/>
+                  </a:rPr>
+                  <a:t> </a:t>
+                </a:r>
+              </a:p>
+            </p:txBody>
+          </p:sp>
+        </mc:Fallback>
+      </mc:AlternateContent>
+      <p:sp>
+        <p:nvSpPr>
+          <p:cNvPr id="4" name="Slide Number Placeholder 3">
+            <a:extLst>
+              <a:ext uri="{FF2B5EF4-FFF2-40B4-BE49-F238E27FC236}">
+                <a16:creationId xmlns:a16="http://schemas.microsoft.com/office/drawing/2014/main" id="{47285E25-64A7-C03B-AE84-49713C566E91}"/>
+              </a:ext>
+            </a:extLst>
+          </p:cNvPr>
+          <p:cNvSpPr>
+            <a:spLocks noGrp="1"/>
+          </p:cNvSpPr>
+          <p:nvPr>
+            <p:ph type="sldNum" sz="quarter" idx="12"/>
+          </p:nvPr>
+        </p:nvSpPr>
+        <p:spPr/>
+        <p:txBody>
+          <a:bodyPr/>
+          <a:lstStyle/>
+          <a:p>
+            <a:fld id="{5A064C77-022D-3743-A04E-645624933D1D}" type="slidenum">
+              <a:rPr lang="en-US" smtClean="0"/>
+              <a:t>11</a:t>
+            </a:fld>
+            <a:endParaRPr lang="en-US"/>
+          </a:p>
+        </p:txBody>
+      </p:sp>
+    </p:spTree>
+    <p:extLst>
+      <p:ext uri="{BB962C8B-B14F-4D97-AF65-F5344CB8AC3E}">
+        <p14:creationId xmlns:p14="http://schemas.microsoft.com/office/powerpoint/2010/main" val="1906068732"/>
+      </p:ext>
+    </p:extLst>
+  </p:cSld>
+  <p:clrMapOvr>
+    <a:masterClrMapping/>
+  </p:clrMapOvr>
+</p:sld>
+</file>
+
+<file path=ppt/slides/slide12.xml><?xml version="1.0" encoding="utf-8"?>
+<p:sld xmlns:a="http://schemas.openxmlformats.org/drawingml/2006/main" xmlns:r="http://schemas.openxmlformats.org/officeDocument/2006/relationships" xmlns:p="http://schemas.openxmlformats.org/presentationml/2006/main">
+  <p:cSld>
+    <p:spTree>
+      <p:nvGrpSpPr>
+        <p:cNvPr id="1" name=""/>
+        <p:cNvGrpSpPr/>
+        <p:nvPr/>
+      </p:nvGrpSpPr>
+      <p:grpSpPr>
+        <a:xfrm>
+          <a:off x="0" y="0"/>
+          <a:ext cx="0" cy="0"/>
+          <a:chOff x="0" y="0"/>
+          <a:chExt cx="0" cy="0"/>
+        </a:xfrm>
+      </p:grpSpPr>
+      <p:sp>
+        <p:nvSpPr>
+          <p:cNvPr id="2" name="Title 1">
+            <a:extLst>
+              <a:ext uri="{FF2B5EF4-FFF2-40B4-BE49-F238E27FC236}">
                 <a16:creationId xmlns:a16="http://schemas.microsoft.com/office/drawing/2014/main" id="{78ECEBB4-D6E4-BBDA-3C9E-C93B1CB59040}"/>
               </a:ext>
             </a:extLst>
@@ -4621,7 +5833,7 @@
               <a:p>
                 <a:r>
                   <a:rPr lang="en-US" dirty="0"/>
-                  <a:t>Very simple to implement.</a:t>
+                  <a:t>Very simple to implement</a:t>
                 </a:r>
               </a:p>
               <a:p>
@@ -4655,7 +5867,7 @@
                 </a14:m>
                 <a:r>
                   <a:rPr lang="en-US" dirty="0"/>
-                  <a:t>) instead of one.</a:t>
+                  <a:t>) instead of one</a:t>
                 </a:r>
               </a:p>
               <a:p>
@@ -4693,7 +5905,7 @@
               <a:blipFill>
                 <a:blip r:embed="rId2"/>
                 <a:stretch>
-                  <a:fillRect l="-3930" t="-2241" r="-3493" b="-140"/>
+                  <a:fillRect l="-4072" t="-2326" r="-6787"/>
                 </a:stretch>
               </a:blipFill>
             </p:spPr>
@@ -4702,7 +5914,7 @@
               <a:lstStyle/>
               <a:p>
                 <a:r>
-                  <a:rPr lang="en-IE">
+                  <a:rPr lang="en-US">
                     <a:noFill/>
                   </a:rPr>
                   <a:t> </a:t>
@@ -5125,7 +6337,7 @@
           <a:p>
             <a:fld id="{5A064C77-022D-3743-A04E-645624933D1D}" type="slidenum">
               <a:rPr lang="en-US" smtClean="0"/>
-              <a:t>10</a:t>
+              <a:t>12</a:t>
             </a:fld>
             <a:endParaRPr lang="en-US"/>
           </a:p>
@@ -5144,7 +6356,7 @@
 </p:sld>
 </file>
 
-<file path=ppt/slides/slide11.xml><?xml version="1.0" encoding="utf-8"?>
+<file path=ppt/slides/slide13.xml><?xml version="1.0" encoding="utf-8"?>
 <p:sld xmlns:a="http://schemas.openxmlformats.org/drawingml/2006/main" xmlns:r="http://schemas.openxmlformats.org/officeDocument/2006/relationships" xmlns:p="http://schemas.openxmlformats.org/presentationml/2006/main">
   <p:cSld>
     <p:spTree>
@@ -5480,7 +6692,7 @@
           <a:p>
             <a:fld id="{5A064C77-022D-3743-A04E-645624933D1D}" type="slidenum">
               <a:rPr lang="en-US" smtClean="0"/>
-              <a:t>11</a:t>
+              <a:t>13</a:t>
             </a:fld>
             <a:endParaRPr lang="en-US"/>
           </a:p>
@@ -5499,7 +6711,7 @@
 </p:sld>
 </file>
 
-<file path=ppt/slides/slide12.xml><?xml version="1.0" encoding="utf-8"?>
+<file path=ppt/slides/slide14.xml><?xml version="1.0" encoding="utf-8"?>
 <p:sld xmlns:a="http://schemas.openxmlformats.org/drawingml/2006/main" xmlns:r="http://schemas.openxmlformats.org/officeDocument/2006/relationships" xmlns:p="http://schemas.openxmlformats.org/presentationml/2006/main">
   <p:cSld>
     <p:spTree>
@@ -5574,25 +6786,25 @@
           <a:p>
             <a:r>
               <a:rPr lang="en-US" dirty="0"/>
-              <a:t>We can use this with LSTMs or Transformers to produce probabilistic forecasts of the next time step.</a:t>
+              <a:t>We can use this with LSTMs or Transformers to produce probabilistic forecasts of the next time step</a:t>
             </a:r>
           </a:p>
           <a:p>
             <a:r>
               <a:rPr lang="en-US" dirty="0"/>
-              <a:t>Just add the extra layers to the head and adjust the loss function to a proper scoring rule.</a:t>
+              <a:t>Just add the extra layers to the head and adjust the loss function to a proper scoring rule</a:t>
             </a:r>
           </a:p>
           <a:p>
             <a:r>
               <a:rPr lang="en-US" dirty="0"/>
-              <a:t>Be sure to check that your output makes sense.</a:t>
+              <a:t>Be sure to check that your output makes sense</a:t>
             </a:r>
           </a:p>
           <a:p>
             <a:r>
               <a:rPr lang="en-US" dirty="0"/>
-              <a:t>Can be applied to all the other models we have met (and many more that we haven’t).</a:t>
+              <a:t>Can be applied to all the other models we have met (and many more that we haven’t)</a:t>
             </a:r>
           </a:p>
         </p:txBody>
@@ -5620,7 +6832,7 @@
           <a:p>
             <a:fld id="{5A064C77-022D-3743-A04E-645624933D1D}" type="slidenum">
               <a:rPr lang="en-US" smtClean="0"/>
-              <a:t>12</a:t>
+              <a:t>14</a:t>
             </a:fld>
             <a:endParaRPr lang="en-US"/>
           </a:p>
@@ -5639,7 +6851,7 @@
 </p:sld>
 </file>
 
-<file path=ppt/slides/slide13.xml><?xml version="1.0" encoding="utf-8"?>
+<file path=ppt/slides/slide15.xml><?xml version="1.0" encoding="utf-8"?>
 <p:sld xmlns:a="http://schemas.openxmlformats.org/drawingml/2006/main" xmlns:r="http://schemas.openxmlformats.org/officeDocument/2006/relationships" xmlns:p="http://schemas.openxmlformats.org/presentationml/2006/main">
   <p:cSld>
     <p:spTree>
@@ -5750,7 +6962,7 @@
           <a:p>
             <a:fld id="{5A064C77-022D-3743-A04E-645624933D1D}" type="slidenum">
               <a:rPr lang="en-US" smtClean="0"/>
-              <a:t>13</a:t>
+              <a:t>15</a:t>
             </a:fld>
             <a:endParaRPr lang="en-US"/>
           </a:p>
@@ -5826,7 +7038,7 @@
 </p:sld>
 </file>
 
-<file path=ppt/slides/slide14.xml><?xml version="1.0" encoding="utf-8"?>
+<file path=ppt/slides/slide16.xml><?xml version="1.0" encoding="utf-8"?>
 <p:sld xmlns:a="http://schemas.openxmlformats.org/drawingml/2006/main" xmlns:r="http://schemas.openxmlformats.org/officeDocument/2006/relationships" xmlns:p="http://schemas.openxmlformats.org/presentationml/2006/main">
   <p:cSld>
     <p:spTree>
@@ -5936,7 +7148,7 @@
           <a:p>
             <a:fld id="{5A064C77-022D-3743-A04E-645624933D1D}" type="slidenum">
               <a:rPr lang="en-US" smtClean="0"/>
-              <a:t>14</a:t>
+              <a:t>16</a:t>
             </a:fld>
             <a:endParaRPr lang="en-US"/>
           </a:p>
@@ -6012,7 +7224,7 @@
 </p:sld>
 </file>
 
-<file path=ppt/slides/slide15.xml><?xml version="1.0" encoding="utf-8"?>
+<file path=ppt/slides/slide17.xml><?xml version="1.0" encoding="utf-8"?>
 <p:sld xmlns:a="http://schemas.openxmlformats.org/drawingml/2006/main" xmlns:r="http://schemas.openxmlformats.org/officeDocument/2006/relationships" xmlns:p="http://schemas.openxmlformats.org/presentationml/2006/main">
   <p:cSld>
     <p:spTree>
@@ -6080,7 +7292,7 @@
             <p:spPr/>
             <p:txBody>
               <a:bodyPr>
-                <a:normAutofit fontScale="92500" lnSpcReduction="10000"/>
+                <a:normAutofit fontScale="92500"/>
               </a:bodyPr>
               <a:lstStyle/>
               <a:p>
@@ -6190,7 +7402,7 @@
                 </a:r>
                 <a:r>
                   <a:rPr lang="en-IE" dirty="0"/>
-                  <a:t>histogram should be flat.</a:t>
+                  <a:t>histogram should be flat</a:t>
                 </a:r>
               </a:p>
               <a:p>
@@ -6203,28 +7415,28 @@
                 <a:pPr lvl="1"/>
                 <a:r>
                   <a:rPr lang="en-US" dirty="0"/>
-                  <a:t>U-shape: under-dispersed (intervals too narrow).</a:t>
+                  <a:t>U-shape: under-dispersed (intervals too narrow)</a:t>
                 </a:r>
               </a:p>
               <a:p>
                 <a:pPr lvl="1"/>
                 <a:r>
                   <a:rPr lang="en-US" dirty="0"/>
-                  <a:t>Hump: over-dispersed (intervals too wide).</a:t>
+                  <a:t>Hump: over-dispersed (intervals too wide)</a:t>
                 </a:r>
               </a:p>
               <a:p>
                 <a:pPr lvl="1"/>
                 <a:r>
                   <a:rPr lang="en-US" dirty="0"/>
-                  <a:t>Left/Right skew: negative/positive bias.</a:t>
+                  <a:t>Left/Right skew: negative/positive bias</a:t>
                 </a:r>
               </a:p>
               <a:p>
                 <a:pPr lvl="1"/>
                 <a:r>
                   <a:rPr lang="en-US" dirty="0"/>
-                  <a:t>Spikes at 0 or 1: support/tails mis-specified.</a:t>
+                  <a:t>Spikes at 0 or 1: support/tails mis-specified</a:t>
                 </a:r>
               </a:p>
               <a:p>
@@ -6237,7 +7449,7 @@
               <a:p>
                 <a:r>
                   <a:rPr lang="en-US" dirty="0"/>
-                  <a:t>Checks calibration across the full CDF; complements single-number scores like CRPS/NLL.</a:t>
+                  <a:t>Checks calibration across the full CDF; complements single-number scores like CRPS/NLL</a:t>
                 </a:r>
                 <a:endParaRPr lang="en-IE" dirty="0"/>
               </a:p>
@@ -6265,7 +7477,7 @@
               <a:blipFill>
                 <a:blip r:embed="rId2"/>
                 <a:stretch>
-                  <a:fillRect l="-1216" t="-2744" r="-912"/>
+                  <a:fillRect l="-1216" t="-1829" r="-912" b="-915"/>
                 </a:stretch>
               </a:blipFill>
             </p:spPr>
@@ -6307,7 +7519,7 @@
           <a:p>
             <a:fld id="{5A064C77-022D-3743-A04E-645624933D1D}" type="slidenum">
               <a:rPr lang="en-US" smtClean="0"/>
-              <a:t>15</a:t>
+              <a:t>17</a:t>
             </a:fld>
             <a:endParaRPr lang="en-US"/>
           </a:p>
@@ -6317,300 +7529,6 @@
     <p:extLst>
       <p:ext uri="{BB962C8B-B14F-4D97-AF65-F5344CB8AC3E}">
         <p14:creationId xmlns:p14="http://schemas.microsoft.com/office/powerpoint/2010/main" val="3349085991"/>
-      </p:ext>
-    </p:extLst>
-  </p:cSld>
-  <p:clrMapOvr>
-    <a:masterClrMapping/>
-  </p:clrMapOvr>
-</p:sld>
-</file>
-
-<file path=ppt/slides/slide16.xml><?xml version="1.0" encoding="utf-8"?>
-<p:sld xmlns:a="http://schemas.openxmlformats.org/drawingml/2006/main" xmlns:r="http://schemas.openxmlformats.org/officeDocument/2006/relationships" xmlns:p="http://schemas.openxmlformats.org/presentationml/2006/main">
-  <p:cSld>
-    <p:spTree>
-      <p:nvGrpSpPr>
-        <p:cNvPr id="1" name=""/>
-        <p:cNvGrpSpPr/>
-        <p:nvPr/>
-      </p:nvGrpSpPr>
-      <p:grpSpPr>
-        <a:xfrm>
-          <a:off x="0" y="0"/>
-          <a:ext cx="0" cy="0"/>
-          <a:chOff x="0" y="0"/>
-          <a:chExt cx="0" cy="0"/>
-        </a:xfrm>
-      </p:grpSpPr>
-      <p:sp>
-        <p:nvSpPr>
-          <p:cNvPr id="2" name="Title 1">
-            <a:extLst>
-              <a:ext uri="{FF2B5EF4-FFF2-40B4-BE49-F238E27FC236}">
-                <a16:creationId xmlns:a16="http://schemas.microsoft.com/office/drawing/2014/main" id="{098AFDFF-5D40-E83A-E71B-D6A4BCC06313}"/>
-              </a:ext>
-            </a:extLst>
-          </p:cNvPr>
-          <p:cNvSpPr>
-            <a:spLocks noGrp="1"/>
-          </p:cNvSpPr>
-          <p:nvPr>
-            <p:ph type="title"/>
-          </p:nvPr>
-        </p:nvSpPr>
-        <p:spPr/>
-        <p:txBody>
-          <a:bodyPr/>
-          <a:lstStyle/>
-          <a:p>
-            <a:r>
-              <a:rPr lang="en-IE" dirty="0"/>
-              <a:t>The PIT for our data</a:t>
-            </a:r>
-          </a:p>
-        </p:txBody>
-      </p:sp>
-      <p:pic>
-        <p:nvPicPr>
-          <p:cNvPr id="8" name="Content Placeholder 7">
-            <a:extLst>
-              <a:ext uri="{FF2B5EF4-FFF2-40B4-BE49-F238E27FC236}">
-                <a16:creationId xmlns:a16="http://schemas.microsoft.com/office/drawing/2014/main" id="{1D85B9EB-0B81-5C6C-E0D3-EFE0F787F99A}"/>
-              </a:ext>
-            </a:extLst>
-          </p:cNvPr>
-          <p:cNvPicPr>
-            <a:picLocks noGrp="1" noChangeAspect="1"/>
-          </p:cNvPicPr>
-          <p:nvPr>
-            <p:ph sz="half" idx="1"/>
-          </p:nvPr>
-        </p:nvPicPr>
-        <p:blipFill>
-          <a:blip r:embed="rId2"/>
-          <a:stretch>
-            <a:fillRect/>
-          </a:stretch>
-        </p:blipFill>
-        <p:spPr>
-          <a:xfrm>
-            <a:off x="838200" y="1903760"/>
-            <a:ext cx="5181600" cy="4195067"/>
-          </a:xfrm>
-          <a:prstGeom prst="rect">
-            <a:avLst/>
-          </a:prstGeom>
-        </p:spPr>
-      </p:pic>
-      <p:sp>
-        <p:nvSpPr>
-          <p:cNvPr id="9" name="Content Placeholder 8">
-            <a:extLst>
-              <a:ext uri="{FF2B5EF4-FFF2-40B4-BE49-F238E27FC236}">
-                <a16:creationId xmlns:a16="http://schemas.microsoft.com/office/drawing/2014/main" id="{0591E77F-05A2-BF0E-E5CD-C4D440E1B17C}"/>
-              </a:ext>
-            </a:extLst>
-          </p:cNvPr>
-          <p:cNvSpPr>
-            <a:spLocks noGrp="1"/>
-          </p:cNvSpPr>
-          <p:nvPr>
-            <p:ph sz="half" idx="2"/>
-          </p:nvPr>
-        </p:nvSpPr>
-        <p:spPr/>
-        <p:txBody>
-          <a:bodyPr/>
-          <a:lstStyle/>
-          <a:p>
-            <a:r>
-              <a:rPr lang="en-IE" dirty="0"/>
-              <a:t>A bit skewed</a:t>
-            </a:r>
-          </a:p>
-          <a:p>
-            <a:r>
-              <a:rPr lang="en-IE" dirty="0"/>
-              <a:t>Might need a richer model?</a:t>
-            </a:r>
-          </a:p>
-          <a:p>
-            <a:r>
-              <a:rPr lang="en-IE" dirty="0"/>
-              <a:t>Increase the number of hidden layers or the complexity of the NN</a:t>
-            </a:r>
-          </a:p>
-        </p:txBody>
-      </p:sp>
-      <p:sp>
-        <p:nvSpPr>
-          <p:cNvPr id="4" name="Slide Number Placeholder 3">
-            <a:extLst>
-              <a:ext uri="{FF2B5EF4-FFF2-40B4-BE49-F238E27FC236}">
-                <a16:creationId xmlns:a16="http://schemas.microsoft.com/office/drawing/2014/main" id="{EBDBE08F-F32B-4543-0DEF-6F88C0DE3794}"/>
-              </a:ext>
-            </a:extLst>
-          </p:cNvPr>
-          <p:cNvSpPr>
-            <a:spLocks noGrp="1"/>
-          </p:cNvSpPr>
-          <p:nvPr>
-            <p:ph type="sldNum" sz="quarter" idx="12"/>
-          </p:nvPr>
-        </p:nvSpPr>
-        <p:spPr/>
-        <p:txBody>
-          <a:bodyPr/>
-          <a:lstStyle/>
-          <a:p>
-            <a:fld id="{5A064C77-022D-3743-A04E-645624933D1D}" type="slidenum">
-              <a:rPr lang="en-US" smtClean="0"/>
-              <a:t>16</a:t>
-            </a:fld>
-            <a:endParaRPr lang="en-US"/>
-          </a:p>
-        </p:txBody>
-      </p:sp>
-    </p:spTree>
-    <p:extLst>
-      <p:ext uri="{BB962C8B-B14F-4D97-AF65-F5344CB8AC3E}">
-        <p14:creationId xmlns:p14="http://schemas.microsoft.com/office/powerpoint/2010/main" val="1980587239"/>
-      </p:ext>
-    </p:extLst>
-  </p:cSld>
-  <p:clrMapOvr>
-    <a:masterClrMapping/>
-  </p:clrMapOvr>
-</p:sld>
-</file>
-
-<file path=ppt/slides/slide17.xml><?xml version="1.0" encoding="utf-8"?>
-<p:sld xmlns:a="http://schemas.openxmlformats.org/drawingml/2006/main" xmlns:r="http://schemas.openxmlformats.org/officeDocument/2006/relationships" xmlns:p="http://schemas.openxmlformats.org/presentationml/2006/main">
-  <p:cSld>
-    <p:spTree>
-      <p:nvGrpSpPr>
-        <p:cNvPr id="1" name=""/>
-        <p:cNvGrpSpPr/>
-        <p:nvPr/>
-      </p:nvGrpSpPr>
-      <p:grpSpPr>
-        <a:xfrm>
-          <a:off x="0" y="0"/>
-          <a:ext cx="0" cy="0"/>
-          <a:chOff x="0" y="0"/>
-          <a:chExt cx="0" cy="0"/>
-        </a:xfrm>
-      </p:grpSpPr>
-      <p:sp>
-        <p:nvSpPr>
-          <p:cNvPr id="2" name="Title 1">
-            <a:extLst>
-              <a:ext uri="{FF2B5EF4-FFF2-40B4-BE49-F238E27FC236}">
-                <a16:creationId xmlns:a16="http://schemas.microsoft.com/office/drawing/2014/main" id="{79401CF0-CBA6-526A-EEE5-30E8D8010D33}"/>
-              </a:ext>
-            </a:extLst>
-          </p:cNvPr>
-          <p:cNvSpPr>
-            <a:spLocks noGrp="1"/>
-          </p:cNvSpPr>
-          <p:nvPr>
-            <p:ph type="title"/>
-          </p:nvPr>
-        </p:nvSpPr>
-        <p:spPr/>
-        <p:txBody>
-          <a:bodyPr/>
-          <a:lstStyle/>
-          <a:p>
-            <a:r>
-              <a:rPr lang="en-US" dirty="0"/>
-              <a:t>Other approaches</a:t>
-            </a:r>
-          </a:p>
-        </p:txBody>
-      </p:sp>
-      <p:sp>
-        <p:nvSpPr>
-          <p:cNvPr id="3" name="Content Placeholder 2">
-            <a:extLst>
-              <a:ext uri="{FF2B5EF4-FFF2-40B4-BE49-F238E27FC236}">
-                <a16:creationId xmlns:a16="http://schemas.microsoft.com/office/drawing/2014/main" id="{47212A90-F05B-F8D2-896B-5307C11A3A83}"/>
-              </a:ext>
-            </a:extLst>
-          </p:cNvPr>
-          <p:cNvSpPr>
-            <a:spLocks noGrp="1"/>
-          </p:cNvSpPr>
-          <p:nvPr>
-            <p:ph idx="1"/>
-          </p:nvPr>
-        </p:nvSpPr>
-        <p:spPr/>
-        <p:txBody>
-          <a:bodyPr>
-            <a:normAutofit/>
-          </a:bodyPr>
-          <a:lstStyle/>
-          <a:p>
-            <a:r>
-              <a:rPr lang="en-US" dirty="0"/>
-              <a:t>Mixture Density Networks (MDN): output mixture weights, means &amp; variances.</a:t>
-            </a:r>
-          </a:p>
-          <a:p>
-            <a:r>
-              <a:rPr lang="en-US" dirty="0"/>
-              <a:t>Quantile Regression Networks: output specific quantiles using pinball loss.</a:t>
-            </a:r>
-          </a:p>
-          <a:p>
-            <a:r>
-              <a:rPr lang="en-US" dirty="0"/>
-              <a:t>Generative models (GANs/VAEs): sample entire distributions.</a:t>
-            </a:r>
-          </a:p>
-          <a:p>
-            <a:r>
-              <a:rPr lang="en-US" dirty="0"/>
-              <a:t>Bayesian neural networks: place priors over weights to capture uncertainty.</a:t>
-            </a:r>
-          </a:p>
-        </p:txBody>
-      </p:sp>
-      <p:sp>
-        <p:nvSpPr>
-          <p:cNvPr id="4" name="Slide Number Placeholder 3">
-            <a:extLst>
-              <a:ext uri="{FF2B5EF4-FFF2-40B4-BE49-F238E27FC236}">
-                <a16:creationId xmlns:a16="http://schemas.microsoft.com/office/drawing/2014/main" id="{1D55B1DA-8E7D-C708-6434-7A1FD16F1483}"/>
-              </a:ext>
-            </a:extLst>
-          </p:cNvPr>
-          <p:cNvSpPr>
-            <a:spLocks noGrp="1"/>
-          </p:cNvSpPr>
-          <p:nvPr>
-            <p:ph type="sldNum" sz="quarter" idx="12"/>
-          </p:nvPr>
-        </p:nvSpPr>
-        <p:spPr/>
-        <p:txBody>
-          <a:bodyPr/>
-          <a:lstStyle/>
-          <a:p>
-            <a:fld id="{5A064C77-022D-3743-A04E-645624933D1D}" type="slidenum">
-              <a:rPr lang="en-US" smtClean="0"/>
-              <a:t>17</a:t>
-            </a:fld>
-            <a:endParaRPr lang="en-US"/>
-          </a:p>
-        </p:txBody>
-      </p:sp>
-    </p:spTree>
-    <p:extLst>
-      <p:ext uri="{BB962C8B-B14F-4D97-AF65-F5344CB8AC3E}">
-        <p14:creationId xmlns:p14="http://schemas.microsoft.com/office/powerpoint/2010/main" val="1480474761"/>
       </p:ext>
     </p:extLst>
   </p:cSld>
@@ -6642,7 +7560,7 @@
           <p:cNvPr id="2" name="Title 1">
             <a:extLst>
               <a:ext uri="{FF2B5EF4-FFF2-40B4-BE49-F238E27FC236}">
-                <a16:creationId xmlns:a16="http://schemas.microsoft.com/office/drawing/2014/main" id="{72958BD6-BE71-2202-6A4A-4A98E856DBB7}"/>
+                <a16:creationId xmlns:a16="http://schemas.microsoft.com/office/drawing/2014/main" id="{098AFDFF-5D40-E83A-E71B-D6A4BCC06313}"/>
               </a:ext>
             </a:extLst>
           </p:cNvPr>
@@ -6659,142 +7577,90 @@
           <a:lstStyle/>
           <a:p>
             <a:r>
-              <a:rPr lang="en-US" dirty="0"/>
-              <a:t>Model averaging and ensembles</a:t>
-            </a:r>
-          </a:p>
-        </p:txBody>
-      </p:sp>
-      <p:sp>
-        <p:nvSpPr>
-          <p:cNvPr id="3" name="Content Placeholder 2">
-            <a:extLst>
-              <a:ext uri="{FF2B5EF4-FFF2-40B4-BE49-F238E27FC236}">
-                <a16:creationId xmlns:a16="http://schemas.microsoft.com/office/drawing/2014/main" id="{F232633B-84D3-B320-B3AE-F6C605939BA6}"/>
-              </a:ext>
-            </a:extLst>
-          </p:cNvPr>
-          <p:cNvSpPr>
-            <a:spLocks noGrp="1"/>
-          </p:cNvSpPr>
-          <p:nvPr>
-            <p:ph idx="1"/>
-          </p:nvPr>
-        </p:nvSpPr>
+              <a:rPr lang="en-IE" dirty="0"/>
+              <a:t>The PIT for our data</a:t>
+            </a:r>
+          </a:p>
+        </p:txBody>
+      </p:sp>
+      <p:pic>
+        <p:nvPicPr>
+          <p:cNvPr id="8" name="Content Placeholder 7">
+            <a:extLst>
+              <a:ext uri="{FF2B5EF4-FFF2-40B4-BE49-F238E27FC236}">
+                <a16:creationId xmlns:a16="http://schemas.microsoft.com/office/drawing/2014/main" id="{1D85B9EB-0B81-5C6C-E0D3-EFE0F787F99A}"/>
+              </a:ext>
+            </a:extLst>
+          </p:cNvPr>
+          <p:cNvPicPr>
+            <a:picLocks noGrp="1" noChangeAspect="1"/>
+          </p:cNvPicPr>
+          <p:nvPr>
+            <p:ph sz="half" idx="1"/>
+          </p:nvPr>
+        </p:nvPicPr>
+        <p:blipFill>
+          <a:blip r:embed="rId2"/>
+          <a:stretch>
+            <a:fillRect/>
+          </a:stretch>
+        </p:blipFill>
         <p:spPr>
           <a:xfrm>
-            <a:off x="838200" y="1825625"/>
-            <a:ext cx="5363497" cy="4149290"/>
-          </a:xfrm>
-        </p:spPr>
-        <p:txBody>
-          <a:bodyPr>
-            <a:normAutofit lnSpcReduction="10000"/>
-          </a:bodyPr>
-          <a:lstStyle/>
-          <a:p>
-            <a:r>
-              <a:rPr lang="en-US" dirty="0"/>
-              <a:t>Averaging multiple models can improve calibration and sharpness.</a:t>
-            </a:r>
-          </a:p>
-          <a:p>
-            <a:r>
-              <a:rPr lang="en-US" dirty="0"/>
-              <a:t>Use ensembles of CNNs/LSTMs trained with different </a:t>
-            </a:r>
-            <a:r>
-              <a:rPr lang="en-US" dirty="0" err="1"/>
-              <a:t>initialisations</a:t>
-            </a:r>
-            <a:r>
-              <a:rPr lang="en-US" dirty="0"/>
-              <a:t>.</a:t>
-            </a:r>
-          </a:p>
-          <a:p>
-            <a:r>
-              <a:rPr lang="en-US" dirty="0"/>
-              <a:t>Alternatively combine models (including deterministic models) with probabilistic postprocessing (e.g., quantile regression).</a:t>
-            </a:r>
-          </a:p>
-        </p:txBody>
-      </p:sp>
-      <p:graphicFrame>
-        <p:nvGraphicFramePr>
-          <p:cNvPr id="4" name="Chart 0">
-            <a:extLst>
-              <a:ext uri="{FF2B5EF4-FFF2-40B4-BE49-F238E27FC236}">
-                <a16:creationId xmlns:a16="http://schemas.microsoft.com/office/drawing/2014/main" id="{6B4805CC-2862-F481-4ADB-1B38E945184E}"/>
-              </a:ext>
-            </a:extLst>
-          </p:cNvPr>
-          <p:cNvGraphicFramePr/>
-          <p:nvPr>
-            <p:extLst>
-              <p:ext uri="{D42A27DB-BD31-4B8C-83A1-F6EECF244321}">
-                <p14:modId xmlns:p14="http://schemas.microsoft.com/office/powerpoint/2010/main" val="2142911812"/>
-              </p:ext>
-            </p:extLst>
-          </p:nvPr>
-        </p:nvGraphicFramePr>
-        <p:xfrm>
-          <a:off x="6711008" y="1825625"/>
-          <a:ext cx="4389120" cy="2682240"/>
-        </p:xfrm>
-        <a:graphic>
-          <a:graphicData uri="http://schemas.openxmlformats.org/drawingml/2006/chart">
-            <c:chart xmlns:c="http://schemas.openxmlformats.org/drawingml/2006/chart" xmlns:r="http://schemas.openxmlformats.org/officeDocument/2006/relationships" r:id="rId2"/>
-          </a:graphicData>
-        </a:graphic>
-      </p:graphicFrame>
-      <p:sp>
-        <p:nvSpPr>
-          <p:cNvPr id="5" name="Text 2">
-            <a:extLst>
-              <a:ext uri="{FF2B5EF4-FFF2-40B4-BE49-F238E27FC236}">
-                <a16:creationId xmlns:a16="http://schemas.microsoft.com/office/drawing/2014/main" id="{6BCA318C-09B0-160A-2546-7399723ECA9D}"/>
-              </a:ext>
-            </a:extLst>
-          </p:cNvPr>
-          <p:cNvSpPr/>
-          <p:nvPr/>
-        </p:nvSpPr>
-        <p:spPr>
-          <a:xfrm>
-            <a:off x="6711008" y="4497051"/>
-            <a:ext cx="4389120" cy="487680"/>
+            <a:off x="838200" y="1903760"/>
+            <a:ext cx="5181600" cy="4195067"/>
           </a:xfrm>
           <a:prstGeom prst="rect">
             <a:avLst/>
           </a:prstGeom>
-          <a:solidFill>
-            <a:schemeClr val="bg1"/>
-          </a:solidFill>
-          <a:ln/>
         </p:spPr>
-        <p:txBody>
-          <a:bodyPr wrap="square" rtlCol="0" anchor="ctr"/>
+      </p:pic>
+      <p:sp>
+        <p:nvSpPr>
+          <p:cNvPr id="9" name="Content Placeholder 8">
+            <a:extLst>
+              <a:ext uri="{FF2B5EF4-FFF2-40B4-BE49-F238E27FC236}">
+                <a16:creationId xmlns:a16="http://schemas.microsoft.com/office/drawing/2014/main" id="{0591E77F-05A2-BF0E-E5CD-C4D440E1B17C}"/>
+              </a:ext>
+            </a:extLst>
+          </p:cNvPr>
+          <p:cNvSpPr>
+            <a:spLocks noGrp="1"/>
+          </p:cNvSpPr>
+          <p:nvPr>
+            <p:ph sz="half" idx="2"/>
+          </p:nvPr>
+        </p:nvSpPr>
+        <p:spPr/>
+        <p:txBody>
+          <a:bodyPr/>
           <a:lstStyle/>
           <a:p>
             <a:r>
-              <a:rPr lang="en-US" sz="1067" dirty="0">
-                <a:solidFill>
-                  <a:srgbClr val="0A2342"/>
-                </a:solidFill>
-              </a:rPr>
-              <a:t>Average CRPS (lower is better)</a:t>
-            </a:r>
-            <a:endParaRPr lang="en-US" sz="1067" dirty="0"/>
-          </a:p>
-        </p:txBody>
-      </p:sp>
-      <p:sp>
-        <p:nvSpPr>
-          <p:cNvPr id="6" name="Slide Number Placeholder 5">
-            <a:extLst>
-              <a:ext uri="{FF2B5EF4-FFF2-40B4-BE49-F238E27FC236}">
-                <a16:creationId xmlns:a16="http://schemas.microsoft.com/office/drawing/2014/main" id="{2EB59BC5-143A-52F7-290C-331B739DCD8B}"/>
+              <a:rPr lang="en-IE" dirty="0"/>
+              <a:t>A bit skewed</a:t>
+            </a:r>
+          </a:p>
+          <a:p>
+            <a:r>
+              <a:rPr lang="en-IE" dirty="0"/>
+              <a:t>Might need a richer model?</a:t>
+            </a:r>
+          </a:p>
+          <a:p>
+            <a:r>
+              <a:rPr lang="en-IE" dirty="0"/>
+              <a:t>Increase the number of hidden layers or the complexity of the NN</a:t>
+            </a:r>
+          </a:p>
+        </p:txBody>
+      </p:sp>
+      <p:sp>
+        <p:nvSpPr>
+          <p:cNvPr id="4" name="Slide Number Placeholder 3">
+            <a:extLst>
+              <a:ext uri="{FF2B5EF4-FFF2-40B4-BE49-F238E27FC236}">
+                <a16:creationId xmlns:a16="http://schemas.microsoft.com/office/drawing/2014/main" id="{EBDBE08F-F32B-4543-0DEF-6F88C0DE3794}"/>
               </a:ext>
             </a:extLst>
           </p:cNvPr>
@@ -6821,7 +7687,7 @@
     </p:spTree>
     <p:extLst>
       <p:ext uri="{BB962C8B-B14F-4D97-AF65-F5344CB8AC3E}">
-        <p14:creationId xmlns:p14="http://schemas.microsoft.com/office/powerpoint/2010/main" val="4214714705"/>
+        <p14:creationId xmlns:p14="http://schemas.microsoft.com/office/powerpoint/2010/main" val="1980587239"/>
       </p:ext>
     </p:extLst>
   </p:cSld>
@@ -6853,7 +7719,7 @@
           <p:cNvPr id="2" name="Title 1">
             <a:extLst>
               <a:ext uri="{FF2B5EF4-FFF2-40B4-BE49-F238E27FC236}">
-                <a16:creationId xmlns:a16="http://schemas.microsoft.com/office/drawing/2014/main" id="{3BED10AE-68F4-B105-D1DD-3C2B58FA4C1D}"/>
+                <a16:creationId xmlns:a16="http://schemas.microsoft.com/office/drawing/2014/main" id="{79401CF0-CBA6-526A-EEE5-30E8D8010D33}"/>
               </a:ext>
             </a:extLst>
           </p:cNvPr>
@@ -6871,7 +7737,7 @@
           <a:p>
             <a:r>
               <a:rPr lang="en-US" dirty="0"/>
-              <a:t>Limitations of probabilistic forecasting</a:t>
+              <a:t>Other approaches</a:t>
             </a:r>
           </a:p>
         </p:txBody>
@@ -6881,7 +7747,7 @@
           <p:cNvPr id="3" name="Content Placeholder 2">
             <a:extLst>
               <a:ext uri="{FF2B5EF4-FFF2-40B4-BE49-F238E27FC236}">
-                <a16:creationId xmlns:a16="http://schemas.microsoft.com/office/drawing/2014/main" id="{05D6D03E-CB00-C601-62A6-CE6F8D537618}"/>
+                <a16:creationId xmlns:a16="http://schemas.microsoft.com/office/drawing/2014/main" id="{47212A90-F05B-F8D2-896B-5307C11A3A83}"/>
               </a:ext>
             </a:extLst>
           </p:cNvPr>
@@ -6901,25 +7767,25 @@
           <a:p>
             <a:r>
               <a:rPr lang="en-US" dirty="0"/>
-              <a:t>Heavy tails and extreme events are difficult to model accurately.</a:t>
+              <a:t>Mixture Density Networks (MDN): output mixture weights, means &amp; variances</a:t>
             </a:r>
           </a:p>
           <a:p>
             <a:r>
               <a:rPr lang="en-US" dirty="0"/>
-              <a:t>Probabilistic calibration may fail under distributional shift.</a:t>
+              <a:t>Quantile Regression Networks: output specific quantiles using pinball loss</a:t>
             </a:r>
           </a:p>
           <a:p>
             <a:r>
               <a:rPr lang="en-US" dirty="0"/>
-              <a:t>Large computational cost of training CRPS/NLL losses for large models.</a:t>
+              <a:t>Generative models (GANs/VAEs): sample entire distributions</a:t>
             </a:r>
           </a:p>
           <a:p>
             <a:r>
               <a:rPr lang="en-US" dirty="0"/>
-              <a:t>Can be harder to interpret and communicate probabilistic forecasts to stakeholders.</a:t>
+              <a:t>Bayesian neural networks: place priors over weights to capture uncertainty</a:t>
             </a:r>
           </a:p>
         </p:txBody>
@@ -6929,7 +7795,7 @@
           <p:cNvPr id="4" name="Slide Number Placeholder 3">
             <a:extLst>
               <a:ext uri="{FF2B5EF4-FFF2-40B4-BE49-F238E27FC236}">
-                <a16:creationId xmlns:a16="http://schemas.microsoft.com/office/drawing/2014/main" id="{E5E998A9-B427-E3F8-443E-397AA8B30543}"/>
+                <a16:creationId xmlns:a16="http://schemas.microsoft.com/office/drawing/2014/main" id="{1D55B1DA-8E7D-C708-6434-7A1FD16F1483}"/>
               </a:ext>
             </a:extLst>
           </p:cNvPr>
@@ -6956,7 +7822,7 @@
     </p:spTree>
     <p:extLst>
       <p:ext uri="{BB962C8B-B14F-4D97-AF65-F5344CB8AC3E}">
-        <p14:creationId xmlns:p14="http://schemas.microsoft.com/office/powerpoint/2010/main" val="1417076108"/>
+        <p14:creationId xmlns:p14="http://schemas.microsoft.com/office/powerpoint/2010/main" val="1480474761"/>
       </p:ext>
     </p:extLst>
   </p:cSld>
@@ -7159,7 +8025,7 @@
           <p:cNvPr id="2" name="Title 1">
             <a:extLst>
               <a:ext uri="{FF2B5EF4-FFF2-40B4-BE49-F238E27FC236}">
-                <a16:creationId xmlns:a16="http://schemas.microsoft.com/office/drawing/2014/main" id="{5052E3C7-E02A-F443-93FF-99B0D12844EC}"/>
+                <a16:creationId xmlns:a16="http://schemas.microsoft.com/office/drawing/2014/main" id="{72958BD6-BE71-2202-6A4A-4A98E856DBB7}"/>
               </a:ext>
             </a:extLst>
           </p:cNvPr>
@@ -7177,7 +8043,7 @@
           <a:p>
             <a:r>
               <a:rPr lang="en-US" dirty="0"/>
-              <a:t>Summary</a:t>
+              <a:t>Model averaging and ensembles</a:t>
             </a:r>
           </a:p>
         </p:txBody>
@@ -7187,7 +8053,7 @@
           <p:cNvPr id="3" name="Content Placeholder 2">
             <a:extLst>
               <a:ext uri="{FF2B5EF4-FFF2-40B4-BE49-F238E27FC236}">
-                <a16:creationId xmlns:a16="http://schemas.microsoft.com/office/drawing/2014/main" id="{92B1495C-38DD-F9F0-478E-D16C6E4C61EA}"/>
+                <a16:creationId xmlns:a16="http://schemas.microsoft.com/office/drawing/2014/main" id="{F232633B-84D3-B320-B3AE-F6C605939BA6}"/>
               </a:ext>
             </a:extLst>
           </p:cNvPr>
@@ -7198,68 +8064,144 @@
             <p:ph idx="1"/>
           </p:nvPr>
         </p:nvSpPr>
-        <p:spPr/>
+        <p:spPr>
+          <a:xfrm>
+            <a:off x="838200" y="1825625"/>
+            <a:ext cx="5363497" cy="4149290"/>
+          </a:xfrm>
+        </p:spPr>
         <p:txBody>
           <a:bodyPr>
-            <a:normAutofit fontScale="92500" lnSpcReduction="20000"/>
+            <a:normAutofit lnSpcReduction="10000"/>
           </a:bodyPr>
           <a:lstStyle/>
           <a:p>
-            <a:pPr marL="457200" indent="-457200">
-              <a:buFont typeface="Arial" panose="020B0604020202020204" pitchFamily="34" charset="0"/>
-              <a:buChar char="•"/>
-            </a:pPr>
             <a:r>
               <a:rPr lang="en-US" dirty="0"/>
-              <a:t>Probabilistic forecasts quantify uncertainty and enable risk‑aware decisions.</a:t>
-            </a:r>
-          </a:p>
-          <a:p>
-            <a:pPr marL="457200" indent="-457200">
-              <a:buFont typeface="Arial" panose="020B0604020202020204" pitchFamily="34" charset="0"/>
-              <a:buChar char="•"/>
-            </a:pPr>
+              <a:t>Averaging multiple models can improve calibration and sharpness</a:t>
+            </a:r>
+          </a:p>
+          <a:p>
             <a:r>
               <a:rPr lang="en-US" dirty="0"/>
-              <a:t>Proper scoring rules (Brier, Log, CRPS) provide objective loss functions that encourage calibration.</a:t>
-            </a:r>
-          </a:p>
-          <a:p>
-            <a:pPr marL="457200" indent="-457200">
-              <a:buFont typeface="Arial" panose="020B0604020202020204" pitchFamily="34" charset="0"/>
-              <a:buChar char="•"/>
-            </a:pPr>
+              <a:t>Use ensembles of CNNs/LSTMs trained with different </a:t>
+            </a:r>
+            <a:r>
+              <a:rPr lang="en-US" dirty="0" err="1"/>
+              <a:t>initialisations</a:t>
+            </a:r>
+            <a:endParaRPr lang="en-US" dirty="0"/>
+          </a:p>
+          <a:p>
             <a:r>
               <a:rPr lang="en-US" dirty="0"/>
-              <a:t>CNNs and LSTMs can be extended to output distribution parameters and trained with these scoring rules.</a:t>
-            </a:r>
-          </a:p>
-          <a:p>
-            <a:pPr marL="457200" indent="-457200">
-              <a:buFont typeface="Arial" panose="020B0604020202020204" pitchFamily="34" charset="0"/>
-              <a:buChar char="•"/>
-            </a:pPr>
-            <a:r>
-              <a:rPr lang="en-US" dirty="0"/>
-              <a:t>Calibration diagnostics (reliability diagrams, PIT histograms) are essential to evaluate forecasts.</a:t>
-            </a:r>
-          </a:p>
-          <a:p>
-            <a:pPr marL="457200" indent="-457200">
-              <a:buFont typeface="Arial" panose="020B0604020202020204" pitchFamily="34" charset="0"/>
-              <a:buChar char="•"/>
-            </a:pPr>
-            <a:r>
-              <a:rPr lang="en-US" dirty="0"/>
-              <a:t>Ensembles, proper hyperparameter tuning, and advanced models further improve probabilistic forecasts.</a:t>
-            </a:r>
+              <a:t>Alternatively combine models (including deterministic models) with probabilistic postprocessing (e.g., quantile regression)</a:t>
+            </a:r>
+          </a:p>
+        </p:txBody>
+      </p:sp>
+      <p:graphicFrame>
+        <p:nvGraphicFramePr>
+          <p:cNvPr id="4" name="Chart 0">
+            <a:extLst>
+              <a:ext uri="{FF2B5EF4-FFF2-40B4-BE49-F238E27FC236}">
+                <a16:creationId xmlns:a16="http://schemas.microsoft.com/office/drawing/2014/main" id="{6B4805CC-2862-F481-4ADB-1B38E945184E}"/>
+              </a:ext>
+            </a:extLst>
+          </p:cNvPr>
+          <p:cNvGraphicFramePr/>
+          <p:nvPr>
+            <p:extLst>
+              <p:ext uri="{D42A27DB-BD31-4B8C-83A1-F6EECF244321}">
+                <p14:modId xmlns:p14="http://schemas.microsoft.com/office/powerpoint/2010/main" val="2142911812"/>
+              </p:ext>
+            </p:extLst>
+          </p:nvPr>
+        </p:nvGraphicFramePr>
+        <p:xfrm>
+          <a:off x="6711008" y="1825625"/>
+          <a:ext cx="4389120" cy="2682240"/>
+        </p:xfrm>
+        <a:graphic>
+          <a:graphicData uri="http://schemas.openxmlformats.org/drawingml/2006/chart">
+            <c:chart xmlns:c="http://schemas.openxmlformats.org/drawingml/2006/chart" xmlns:r="http://schemas.openxmlformats.org/officeDocument/2006/relationships" r:id="rId2"/>
+          </a:graphicData>
+        </a:graphic>
+      </p:graphicFrame>
+      <p:sp>
+        <p:nvSpPr>
+          <p:cNvPr id="5" name="Text 2">
+            <a:extLst>
+              <a:ext uri="{FF2B5EF4-FFF2-40B4-BE49-F238E27FC236}">
+                <a16:creationId xmlns:a16="http://schemas.microsoft.com/office/drawing/2014/main" id="{6BCA318C-09B0-160A-2546-7399723ECA9D}"/>
+              </a:ext>
+            </a:extLst>
+          </p:cNvPr>
+          <p:cNvSpPr/>
+          <p:nvPr/>
+        </p:nvSpPr>
+        <p:spPr>
+          <a:xfrm>
+            <a:off x="6711008" y="4497051"/>
+            <a:ext cx="4389120" cy="487680"/>
+          </a:xfrm>
+          <a:prstGeom prst="rect">
+            <a:avLst/>
+          </a:prstGeom>
+          <a:solidFill>
+            <a:schemeClr val="bg1"/>
+          </a:solidFill>
+          <a:ln/>
+        </p:spPr>
+        <p:txBody>
+          <a:bodyPr wrap="square" rtlCol="0" anchor="ctr"/>
+          <a:lstStyle/>
+          <a:p>
+            <a:r>
+              <a:rPr lang="en-US" sz="1067" dirty="0">
+                <a:solidFill>
+                  <a:srgbClr val="0A2342"/>
+                </a:solidFill>
+              </a:rPr>
+              <a:t>Average CRPS (lower is better)</a:t>
+            </a:r>
+            <a:endParaRPr lang="en-US" sz="1067" dirty="0"/>
+          </a:p>
+        </p:txBody>
+      </p:sp>
+      <p:sp>
+        <p:nvSpPr>
+          <p:cNvPr id="6" name="Slide Number Placeholder 5">
+            <a:extLst>
+              <a:ext uri="{FF2B5EF4-FFF2-40B4-BE49-F238E27FC236}">
+                <a16:creationId xmlns:a16="http://schemas.microsoft.com/office/drawing/2014/main" id="{2EB59BC5-143A-52F7-290C-331B739DCD8B}"/>
+              </a:ext>
+            </a:extLst>
+          </p:cNvPr>
+          <p:cNvSpPr>
+            <a:spLocks noGrp="1"/>
+          </p:cNvSpPr>
+          <p:nvPr>
+            <p:ph type="sldNum" sz="quarter" idx="12"/>
+          </p:nvPr>
+        </p:nvSpPr>
+        <p:spPr/>
+        <p:txBody>
+          <a:bodyPr/>
+          <a:lstStyle/>
+          <a:p>
+            <a:fld id="{5A064C77-022D-3743-A04E-645624933D1D}" type="slidenum">
+              <a:rPr lang="en-US" smtClean="0"/>
+              <a:t>20</a:t>
+            </a:fld>
+            <a:endParaRPr lang="en-US"/>
           </a:p>
         </p:txBody>
       </p:sp>
     </p:spTree>
     <p:extLst>
       <p:ext uri="{BB962C8B-B14F-4D97-AF65-F5344CB8AC3E}">
-        <p14:creationId xmlns:p14="http://schemas.microsoft.com/office/powerpoint/2010/main" val="2902375257"/>
+        <p14:creationId xmlns:p14="http://schemas.microsoft.com/office/powerpoint/2010/main" val="4214714705"/>
       </p:ext>
     </p:extLst>
   </p:cSld>
@@ -7288,10 +8230,10 @@
       </p:grpSpPr>
       <p:sp>
         <p:nvSpPr>
-          <p:cNvPr id="4" name="Title 3">
-            <a:extLst>
-              <a:ext uri="{FF2B5EF4-FFF2-40B4-BE49-F238E27FC236}">
-                <a16:creationId xmlns:a16="http://schemas.microsoft.com/office/drawing/2014/main" id="{3196EB7C-273C-1DEF-37B2-B8997301D7F0}"/>
+          <p:cNvPr id="2" name="Title 1">
+            <a:extLst>
+              <a:ext uri="{FF2B5EF4-FFF2-40B4-BE49-F238E27FC236}">
+                <a16:creationId xmlns:a16="http://schemas.microsoft.com/office/drawing/2014/main" id="{3BED10AE-68F4-B105-D1DD-3C2B58FA4C1D}"/>
               </a:ext>
             </a:extLst>
           </p:cNvPr>
@@ -7308,18 +8250,18 @@
           <a:lstStyle/>
           <a:p>
             <a:r>
-              <a:rPr lang="en-IE" dirty="0"/>
-              <a:t>Topics we haven’t covered</a:t>
-            </a:r>
-          </a:p>
-        </p:txBody>
-      </p:sp>
-      <p:sp>
-        <p:nvSpPr>
-          <p:cNvPr id="5" name="Content Placeholder 4">
-            <a:extLst>
-              <a:ext uri="{FF2B5EF4-FFF2-40B4-BE49-F238E27FC236}">
-                <a16:creationId xmlns:a16="http://schemas.microsoft.com/office/drawing/2014/main" id="{CB08FEB1-5BC9-76C5-B7F7-9B61C65D47C3}"/>
+              <a:rPr lang="en-US" dirty="0"/>
+              <a:t>Limitations of probabilistic forecasting</a:t>
+            </a:r>
+          </a:p>
+        </p:txBody>
+      </p:sp>
+      <p:sp>
+        <p:nvSpPr>
+          <p:cNvPr id="3" name="Content Placeholder 2">
+            <a:extLst>
+              <a:ext uri="{FF2B5EF4-FFF2-40B4-BE49-F238E27FC236}">
+                <a16:creationId xmlns:a16="http://schemas.microsoft.com/office/drawing/2014/main" id="{05D6D03E-CB00-C601-62A6-CE6F8D537618}"/>
               </a:ext>
             </a:extLst>
           </p:cNvPr>
@@ -7330,48 +8272,71 @@
             <p:ph idx="1"/>
           </p:nvPr>
         </p:nvSpPr>
-        <p:spPr>
-          <a:xfrm>
-            <a:off x="838200" y="1825625"/>
-            <a:ext cx="8348602" cy="4149290"/>
-          </a:xfrm>
-        </p:spPr>
+        <p:spPr/>
         <p:txBody>
           <a:bodyPr>
-            <a:normAutofit fontScale="92500" lnSpcReduction="10000"/>
+            <a:normAutofit/>
           </a:bodyPr>
           <a:lstStyle/>
           <a:p>
             <a:r>
               <a:rPr lang="en-US" dirty="0"/>
-              <a:t>Reinforcement learning: Learns policies via trial and error to potentially change how the model produces forecasts</a:t>
+              <a:t>Heavy tails and extreme events are difficult to model accurately</a:t>
             </a:r>
           </a:p>
           <a:p>
             <a:r>
               <a:rPr lang="en-US" dirty="0"/>
-              <a:t>Diffusion models: a generative approach that maps noise to e.g. realistic atmospheric states; enable ensemble generation, downscaling, and calibrated post-processing.</a:t>
+              <a:t>Probabilistic calibration may fail under distributional shift</a:t>
             </a:r>
           </a:p>
           <a:p>
             <a:r>
               <a:rPr lang="en-US" dirty="0"/>
-              <a:t>Transfer learning: Leverages pretrained models or neighboring regions to boost weather forecasts when e.g. station data are scarce.</a:t>
+              <a:t>Large computational cost of training CRPS/NLL losses for large models</a:t>
             </a:r>
           </a:p>
           <a:p>
             <a:r>
               <a:rPr lang="en-US" dirty="0"/>
-              <a:t>Extremal NNs: Changing the loss function to match either univariate or (even better) multivariate extreme value models.</a:t>
-            </a:r>
-            <a:endParaRPr lang="en-IE" dirty="0"/>
+              <a:t>Can be harder to interpret and communicate probabilistic forecasts to stakeholders</a:t>
+            </a:r>
+          </a:p>
+        </p:txBody>
+      </p:sp>
+      <p:sp>
+        <p:nvSpPr>
+          <p:cNvPr id="4" name="Slide Number Placeholder 3">
+            <a:extLst>
+              <a:ext uri="{FF2B5EF4-FFF2-40B4-BE49-F238E27FC236}">
+                <a16:creationId xmlns:a16="http://schemas.microsoft.com/office/drawing/2014/main" id="{E5E998A9-B427-E3F8-443E-397AA8B30543}"/>
+              </a:ext>
+            </a:extLst>
+          </p:cNvPr>
+          <p:cNvSpPr>
+            <a:spLocks noGrp="1"/>
+          </p:cNvSpPr>
+          <p:nvPr>
+            <p:ph type="sldNum" sz="quarter" idx="12"/>
+          </p:nvPr>
+        </p:nvSpPr>
+        <p:spPr/>
+        <p:txBody>
+          <a:bodyPr/>
+          <a:lstStyle/>
+          <a:p>
+            <a:fld id="{5A064C77-022D-3743-A04E-645624933D1D}" type="slidenum">
+              <a:rPr lang="en-US" smtClean="0"/>
+              <a:t>21</a:t>
+            </a:fld>
+            <a:endParaRPr lang="en-US"/>
           </a:p>
         </p:txBody>
       </p:sp>
     </p:spTree>
     <p:extLst>
       <p:ext uri="{BB962C8B-B14F-4D97-AF65-F5344CB8AC3E}">
-        <p14:creationId xmlns:p14="http://schemas.microsoft.com/office/powerpoint/2010/main" val="2819983390"/>
+        <p14:creationId xmlns:p14="http://schemas.microsoft.com/office/powerpoint/2010/main" val="1417076108"/>
       </p:ext>
     </p:extLst>
   </p:cSld>
@@ -7403,6 +8368,250 @@
           <p:cNvPr id="2" name="Title 1">
             <a:extLst>
               <a:ext uri="{FF2B5EF4-FFF2-40B4-BE49-F238E27FC236}">
+                <a16:creationId xmlns:a16="http://schemas.microsoft.com/office/drawing/2014/main" id="{5052E3C7-E02A-F443-93FF-99B0D12844EC}"/>
+              </a:ext>
+            </a:extLst>
+          </p:cNvPr>
+          <p:cNvSpPr>
+            <a:spLocks noGrp="1"/>
+          </p:cNvSpPr>
+          <p:nvPr>
+            <p:ph type="title"/>
+          </p:nvPr>
+        </p:nvSpPr>
+        <p:spPr/>
+        <p:txBody>
+          <a:bodyPr/>
+          <a:lstStyle/>
+          <a:p>
+            <a:r>
+              <a:rPr lang="en-US" dirty="0"/>
+              <a:t>Summary</a:t>
+            </a:r>
+          </a:p>
+        </p:txBody>
+      </p:sp>
+      <p:sp>
+        <p:nvSpPr>
+          <p:cNvPr id="3" name="Content Placeholder 2">
+            <a:extLst>
+              <a:ext uri="{FF2B5EF4-FFF2-40B4-BE49-F238E27FC236}">
+                <a16:creationId xmlns:a16="http://schemas.microsoft.com/office/drawing/2014/main" id="{92B1495C-38DD-F9F0-478E-D16C6E4C61EA}"/>
+              </a:ext>
+            </a:extLst>
+          </p:cNvPr>
+          <p:cNvSpPr>
+            <a:spLocks noGrp="1"/>
+          </p:cNvSpPr>
+          <p:nvPr>
+            <p:ph idx="1"/>
+          </p:nvPr>
+        </p:nvSpPr>
+        <p:spPr/>
+        <p:txBody>
+          <a:bodyPr>
+            <a:normAutofit fontScale="92500" lnSpcReduction="20000"/>
+          </a:bodyPr>
+          <a:lstStyle/>
+          <a:p>
+            <a:pPr marL="457200" indent="-457200">
+              <a:buFont typeface="Arial" panose="020B0604020202020204" pitchFamily="34" charset="0"/>
+              <a:buChar char="•"/>
+            </a:pPr>
+            <a:r>
+              <a:rPr lang="en-US" dirty="0"/>
+              <a:t>Probabilistic forecasts quantify uncertainty and enable risk‑aware decisions</a:t>
+            </a:r>
+          </a:p>
+          <a:p>
+            <a:pPr marL="457200" indent="-457200">
+              <a:buFont typeface="Arial" panose="020B0604020202020204" pitchFamily="34" charset="0"/>
+              <a:buChar char="•"/>
+            </a:pPr>
+            <a:r>
+              <a:rPr lang="en-US" dirty="0"/>
+              <a:t>Proper scoring rules (Brier, Log, CRPS) provide objective loss functions that encourage calibration</a:t>
+            </a:r>
+          </a:p>
+          <a:p>
+            <a:pPr marL="457200" indent="-457200">
+              <a:buFont typeface="Arial" panose="020B0604020202020204" pitchFamily="34" charset="0"/>
+              <a:buChar char="•"/>
+            </a:pPr>
+            <a:r>
+              <a:rPr lang="en-US" dirty="0"/>
+              <a:t>CNNs and LSTMs can be extended to output distribution parameters and trained with these scoring rules</a:t>
+            </a:r>
+          </a:p>
+          <a:p>
+            <a:pPr marL="457200" indent="-457200">
+              <a:buFont typeface="Arial" panose="020B0604020202020204" pitchFamily="34" charset="0"/>
+              <a:buChar char="•"/>
+            </a:pPr>
+            <a:r>
+              <a:rPr lang="en-US" dirty="0"/>
+              <a:t>Calibration diagnostics (reliability diagrams, PIT histograms) are essential to evaluate forecasts</a:t>
+            </a:r>
+          </a:p>
+          <a:p>
+            <a:pPr marL="457200" indent="-457200">
+              <a:buFont typeface="Arial" panose="020B0604020202020204" pitchFamily="34" charset="0"/>
+              <a:buChar char="•"/>
+            </a:pPr>
+            <a:r>
+              <a:rPr lang="en-US" dirty="0"/>
+              <a:t>Ensembles, proper hyperparameter tuning, and advanced models further improve probabilistic forecasts</a:t>
+            </a:r>
+          </a:p>
+        </p:txBody>
+      </p:sp>
+    </p:spTree>
+    <p:extLst>
+      <p:ext uri="{BB962C8B-B14F-4D97-AF65-F5344CB8AC3E}">
+        <p14:creationId xmlns:p14="http://schemas.microsoft.com/office/powerpoint/2010/main" val="2902375257"/>
+      </p:ext>
+    </p:extLst>
+  </p:cSld>
+  <p:clrMapOvr>
+    <a:masterClrMapping/>
+  </p:clrMapOvr>
+</p:sld>
+</file>
+
+<file path=ppt/slides/slide23.xml><?xml version="1.0" encoding="utf-8"?>
+<p:sld xmlns:a="http://schemas.openxmlformats.org/drawingml/2006/main" xmlns:r="http://schemas.openxmlformats.org/officeDocument/2006/relationships" xmlns:p="http://schemas.openxmlformats.org/presentationml/2006/main">
+  <p:cSld>
+    <p:spTree>
+      <p:nvGrpSpPr>
+        <p:cNvPr id="1" name=""/>
+        <p:cNvGrpSpPr/>
+        <p:nvPr/>
+      </p:nvGrpSpPr>
+      <p:grpSpPr>
+        <a:xfrm>
+          <a:off x="0" y="0"/>
+          <a:ext cx="0" cy="0"/>
+          <a:chOff x="0" y="0"/>
+          <a:chExt cx="0" cy="0"/>
+        </a:xfrm>
+      </p:grpSpPr>
+      <p:sp>
+        <p:nvSpPr>
+          <p:cNvPr id="4" name="Title 3">
+            <a:extLst>
+              <a:ext uri="{FF2B5EF4-FFF2-40B4-BE49-F238E27FC236}">
+                <a16:creationId xmlns:a16="http://schemas.microsoft.com/office/drawing/2014/main" id="{3196EB7C-273C-1DEF-37B2-B8997301D7F0}"/>
+              </a:ext>
+            </a:extLst>
+          </p:cNvPr>
+          <p:cNvSpPr>
+            <a:spLocks noGrp="1"/>
+          </p:cNvSpPr>
+          <p:nvPr>
+            <p:ph type="title"/>
+          </p:nvPr>
+        </p:nvSpPr>
+        <p:spPr/>
+        <p:txBody>
+          <a:bodyPr/>
+          <a:lstStyle/>
+          <a:p>
+            <a:r>
+              <a:rPr lang="en-IE" dirty="0"/>
+              <a:t>Topics we haven’t covered</a:t>
+            </a:r>
+          </a:p>
+        </p:txBody>
+      </p:sp>
+      <p:sp>
+        <p:nvSpPr>
+          <p:cNvPr id="5" name="Content Placeholder 4">
+            <a:extLst>
+              <a:ext uri="{FF2B5EF4-FFF2-40B4-BE49-F238E27FC236}">
+                <a16:creationId xmlns:a16="http://schemas.microsoft.com/office/drawing/2014/main" id="{CB08FEB1-5BC9-76C5-B7F7-9B61C65D47C3}"/>
+              </a:ext>
+            </a:extLst>
+          </p:cNvPr>
+          <p:cNvSpPr>
+            <a:spLocks noGrp="1"/>
+          </p:cNvSpPr>
+          <p:nvPr>
+            <p:ph idx="1"/>
+          </p:nvPr>
+        </p:nvSpPr>
+        <p:spPr>
+          <a:xfrm>
+            <a:off x="838200" y="1825625"/>
+            <a:ext cx="8348602" cy="4149290"/>
+          </a:xfrm>
+        </p:spPr>
+        <p:txBody>
+          <a:bodyPr>
+            <a:normAutofit fontScale="92500" lnSpcReduction="10000"/>
+          </a:bodyPr>
+          <a:lstStyle/>
+          <a:p>
+            <a:r>
+              <a:rPr lang="en-US" dirty="0"/>
+              <a:t>Reinforcement learning: Learns policies via trial and error to potentially change how the model produces forecasts</a:t>
+            </a:r>
+          </a:p>
+          <a:p>
+            <a:r>
+              <a:rPr lang="en-US" dirty="0"/>
+              <a:t>Diffusion models: a generative approach that maps noise to e.g. realistic atmospheric states; enable ensemble generation, downscaling, and calibrated post-processing</a:t>
+            </a:r>
+          </a:p>
+          <a:p>
+            <a:r>
+              <a:rPr lang="en-US" dirty="0"/>
+              <a:t>Transfer learning: Leverages pretrained models or neighboring regions to boost weather forecasts when e.g. station data are scarce</a:t>
+            </a:r>
+          </a:p>
+          <a:p>
+            <a:r>
+              <a:rPr lang="en-US" dirty="0"/>
+              <a:t>Extremal NNs: Changing the loss function to match either univariate or (even better) multivariate extreme value models</a:t>
+            </a:r>
+            <a:endParaRPr lang="en-IE" dirty="0"/>
+          </a:p>
+        </p:txBody>
+      </p:sp>
+    </p:spTree>
+    <p:extLst>
+      <p:ext uri="{BB962C8B-B14F-4D97-AF65-F5344CB8AC3E}">
+        <p14:creationId xmlns:p14="http://schemas.microsoft.com/office/powerpoint/2010/main" val="2819983390"/>
+      </p:ext>
+    </p:extLst>
+  </p:cSld>
+  <p:clrMapOvr>
+    <a:masterClrMapping/>
+  </p:clrMapOvr>
+</p:sld>
+</file>
+
+<file path=ppt/slides/slide24.xml><?xml version="1.0" encoding="utf-8"?>
+<p:sld xmlns:a="http://schemas.openxmlformats.org/drawingml/2006/main" xmlns:r="http://schemas.openxmlformats.org/officeDocument/2006/relationships" xmlns:p="http://schemas.openxmlformats.org/presentationml/2006/main">
+  <p:cSld>
+    <p:spTree>
+      <p:nvGrpSpPr>
+        <p:cNvPr id="1" name=""/>
+        <p:cNvGrpSpPr/>
+        <p:nvPr/>
+      </p:nvGrpSpPr>
+      <p:grpSpPr>
+        <a:xfrm>
+          <a:off x="0" y="0"/>
+          <a:ext cx="0" cy="0"/>
+          <a:chOff x="0" y="0"/>
+          <a:chExt cx="0" cy="0"/>
+        </a:xfrm>
+      </p:grpSpPr>
+      <p:sp>
+        <p:nvSpPr>
+          <p:cNvPr id="2" name="Title 1">
+            <a:extLst>
+              <a:ext uri="{FF2B5EF4-FFF2-40B4-BE49-F238E27FC236}">
                 <a16:creationId xmlns:a16="http://schemas.microsoft.com/office/drawing/2014/main" id="{5272E10E-525F-42F7-F943-C6C1FF1B7CC1}"/>
               </a:ext>
             </a:extLst>
@@ -7474,7 +8683,7 @@
 </p:sld>
 </file>
 
-<file path=ppt/slides/slide23.xml><?xml version="1.0" encoding="utf-8"?>
+<file path=ppt/slides/slide25.xml><?xml version="1.0" encoding="utf-8"?>
 <p:sld xmlns:a="http://schemas.openxmlformats.org/drawingml/2006/main" xmlns:r="http://schemas.openxmlformats.org/officeDocument/2006/relationships" xmlns:p="http://schemas.openxmlformats.org/presentationml/2006/main">
   <p:cSld>
     <p:spTree>
@@ -7608,7 +8817,7 @@
 </p:sld>
 </file>
 
-<file path=ppt/slides/slide24.xml><?xml version="1.0" encoding="utf-8"?>
+<file path=ppt/slides/slide26.xml><?xml version="1.0" encoding="utf-8"?>
 <p:sld xmlns:a="http://schemas.openxmlformats.org/drawingml/2006/main" xmlns:r="http://schemas.openxmlformats.org/officeDocument/2006/relationships" xmlns:p="http://schemas.openxmlformats.org/presentationml/2006/main">
   <p:cSld>
     <p:spTree>
@@ -8109,7 +9318,7 @@
           <a:p>
             <a:r>
               <a:rPr lang="en-US" dirty="0"/>
-              <a:t>Scoring rules evaluate probabilistic forecasts by comparing the predicted distribution to the observed value.</a:t>
+              <a:t>Scoring rules evaluate probabilistic forecasts by comparing the predicted distribution to the observed value</a:t>
             </a:r>
           </a:p>
           <a:p>
@@ -8123,13 +9332,13 @@
             </a:r>
             <a:r>
               <a:rPr lang="en-US" dirty="0"/>
-              <a:t> when the forecast distribution equals the true distribution.</a:t>
+              <a:t> when the forecast distribution equals the true distribution</a:t>
             </a:r>
           </a:p>
           <a:p>
             <a:r>
               <a:rPr lang="en-US" dirty="0"/>
-              <a:t>Proper scoring rules encourage calibration and discourage hedging – making too conservative forecasts.</a:t>
+              <a:t>Proper scoring rules encourage calibration and discourage hedging – making too conservative forecasts</a:t>
             </a:r>
           </a:p>
           <a:p>
@@ -8612,19 +9821,19 @@
           <a:p>
             <a:r>
               <a:rPr lang="en-US" dirty="0"/>
-              <a:t>Reliability: predicted probabilities match observed frequencies.</a:t>
+              <a:t>Reliability: predicted probabilities match observed frequencies</a:t>
             </a:r>
           </a:p>
           <a:p>
             <a:r>
               <a:rPr lang="en-US" dirty="0"/>
-              <a:t>Sharpness: predictive distributions are as concentrated as possible.</a:t>
+              <a:t>Sharpness: predictive distributions are as concentrated as possible</a:t>
             </a:r>
           </a:p>
           <a:p>
             <a:r>
               <a:rPr lang="en-US" dirty="0"/>
-              <a:t>Aim: reliability diagrams close to diagonal and narrow prediction intervals.</a:t>
+              <a:t>Aim: reliability diagrams close to diagonal and narrow prediction intervals</a:t>
             </a:r>
           </a:p>
         </p:txBody>
@@ -8825,7 +10034,7 @@
                 </a:r>
                 <a:r>
                   <a:rPr lang="en-US" dirty="0"/>
-                  <a:t>events.</a:t>
+                  <a:t>events</a:t>
                 </a:r>
               </a:p>
               <a:p>
@@ -9025,10 +10234,7 @@
                     </m:sSup>
                   </m:oMath>
                 </a14:m>
-                <a:r>
-                  <a:rPr lang="en-US" dirty="0"/>
-                  <a:t>.</a:t>
-                </a:r>
+                <a:endParaRPr lang="en-US" dirty="0"/>
               </a:p>
               <a:p>
                 <a:r>
@@ -9222,7 +10428,7 @@
                 <a:ext cx="8245839" cy="4149290"/>
               </a:xfrm>
               <a:blipFill>
-                <a:blip r:embed="rId2"/>
+                <a:blip r:embed="rId3"/>
                 <a:stretch>
                   <a:fillRect l="-1231" t="-2134"/>
                 </a:stretch>
@@ -9286,6 +10492,145 @@
 </file>
 
 <file path=ppt/slides/slide7.xml><?xml version="1.0" encoding="utf-8"?>
+<p:sld xmlns:a="http://schemas.openxmlformats.org/drawingml/2006/main" xmlns:r="http://schemas.openxmlformats.org/officeDocument/2006/relationships" xmlns:p="http://schemas.openxmlformats.org/presentationml/2006/main">
+  <p:cSld>
+    <p:spTree>
+      <p:nvGrpSpPr>
+        <p:cNvPr id="1" name=""/>
+        <p:cNvGrpSpPr/>
+        <p:nvPr/>
+      </p:nvGrpSpPr>
+      <p:grpSpPr>
+        <a:xfrm>
+          <a:off x="0" y="0"/>
+          <a:ext cx="0" cy="0"/>
+          <a:chOff x="0" y="0"/>
+          <a:chExt cx="0" cy="0"/>
+        </a:xfrm>
+      </p:grpSpPr>
+      <p:sp>
+        <p:nvSpPr>
+          <p:cNvPr id="2" name="Title 1">
+            <a:extLst>
+              <a:ext uri="{FF2B5EF4-FFF2-40B4-BE49-F238E27FC236}">
+                <a16:creationId xmlns:a16="http://schemas.microsoft.com/office/drawing/2014/main" id="{99BE7EF1-36CC-A06D-6C24-A10F55CBC008}"/>
+              </a:ext>
+            </a:extLst>
+          </p:cNvPr>
+          <p:cNvSpPr>
+            <a:spLocks noGrp="1"/>
+          </p:cNvSpPr>
+          <p:nvPr>
+            <p:ph type="ctrTitle"/>
+          </p:nvPr>
+        </p:nvSpPr>
+        <p:spPr/>
+        <p:txBody>
+          <a:bodyPr/>
+          <a:lstStyle/>
+          <a:p>
+            <a:endParaRPr lang="en-US"/>
+          </a:p>
+        </p:txBody>
+      </p:sp>
+      <p:sp>
+        <p:nvSpPr>
+          <p:cNvPr id="3" name="Subtitle 2">
+            <a:extLst>
+              <a:ext uri="{FF2B5EF4-FFF2-40B4-BE49-F238E27FC236}">
+                <a16:creationId xmlns:a16="http://schemas.microsoft.com/office/drawing/2014/main" id="{FF7ED59A-E32F-BF5D-79BF-AFB3A95A393A}"/>
+              </a:ext>
+            </a:extLst>
+          </p:cNvPr>
+          <p:cNvSpPr>
+            <a:spLocks noGrp="1"/>
+          </p:cNvSpPr>
+          <p:nvPr>
+            <p:ph type="subTitle" idx="1"/>
+          </p:nvPr>
+        </p:nvSpPr>
+        <p:spPr/>
+        <p:txBody>
+          <a:bodyPr/>
+          <a:lstStyle/>
+          <a:p>
+            <a:endParaRPr lang="en-US"/>
+          </a:p>
+        </p:txBody>
+      </p:sp>
+      <p:sp>
+        <p:nvSpPr>
+          <p:cNvPr id="4" name="Slide Number Placeholder 3">
+            <a:extLst>
+              <a:ext uri="{FF2B5EF4-FFF2-40B4-BE49-F238E27FC236}">
+                <a16:creationId xmlns:a16="http://schemas.microsoft.com/office/drawing/2014/main" id="{F64BC430-45C8-6BFC-56E1-3D819BB0A1A8}"/>
+              </a:ext>
+            </a:extLst>
+          </p:cNvPr>
+          <p:cNvSpPr>
+            <a:spLocks noGrp="1"/>
+          </p:cNvSpPr>
+          <p:nvPr>
+            <p:ph type="sldNum" sz="quarter" idx="11"/>
+          </p:nvPr>
+        </p:nvSpPr>
+        <p:spPr/>
+        <p:txBody>
+          <a:bodyPr/>
+          <a:lstStyle/>
+          <a:p>
+            <a:fld id="{5A064C77-022D-3743-A04E-645624933D1D}" type="slidenum">
+              <a:rPr lang="en-US" smtClean="0"/>
+              <a:t>7</a:t>
+            </a:fld>
+            <a:endParaRPr lang="en-US"/>
+          </a:p>
+        </p:txBody>
+      </p:sp>
+      <p:pic>
+        <p:nvPicPr>
+          <p:cNvPr id="6" name="slide.url=https://www.polleverywhere.com/multiple_choice_polls/vd3UrKUYILga0TJnv0kQ2?state=opened&amp;flow=Default&amp;onscreen=persist">
+            <a:extLst>
+              <a:ext uri="{FF2B5EF4-FFF2-40B4-BE49-F238E27FC236}">
+                <a16:creationId xmlns:a16="http://schemas.microsoft.com/office/drawing/2014/main" id="{67C6EC3F-39CB-A54B-5E46-86AB5C08AF5A}"/>
+              </a:ext>
+            </a:extLst>
+          </p:cNvPr>
+          <p:cNvPicPr>
+            <a:picLocks/>
+          </p:cNvPicPr>
+          <p:nvPr/>
+        </p:nvPicPr>
+        <p:blipFill>
+          <a:blip r:embed="rId3"/>
+          <a:stretch>
+            <a:fillRect/>
+          </a:stretch>
+        </p:blipFill>
+        <p:spPr>
+          <a:xfrm>
+            <a:off x="63500" y="63500"/>
+            <a:ext cx="12065000" cy="6731000"/>
+          </a:xfrm>
+          <a:prstGeom prst="rect">
+            <a:avLst/>
+          </a:prstGeom>
+        </p:spPr>
+      </p:pic>
+    </p:spTree>
+    <p:extLst>
+      <p:ext uri="{BB962C8B-B14F-4D97-AF65-F5344CB8AC3E}">
+        <p14:creationId xmlns:p14="http://schemas.microsoft.com/office/powerpoint/2010/main" val="568725494"/>
+      </p:ext>
+    </p:extLst>
+  </p:cSld>
+  <p:clrMapOvr>
+    <a:masterClrMapping/>
+  </p:clrMapOvr>
+</p:sld>
+</file>
+
+<file path=ppt/slides/slide8.xml><?xml version="1.0" encoding="utf-8"?>
 <p:sld xmlns:a="http://schemas.openxmlformats.org/drawingml/2006/main" xmlns:r="http://schemas.openxmlformats.org/officeDocument/2006/relationships" xmlns:p="http://schemas.openxmlformats.org/presentationml/2006/main">
   <p:cSld>
     <p:spTree>
@@ -9362,7 +10707,7 @@
               <a:p>
                 <a:r>
                   <a:rPr lang="en-US" dirty="0"/>
-                  <a:t>Evaluates the (negative) log likelihood of the observation under the predicted distribution.</a:t>
+                  <a:t>Evaluates the (negative) log likelihood of the observation under the predicted distribution</a:t>
                 </a:r>
               </a:p>
               <a:p>
@@ -9484,15 +10829,12 @@
                     </m:r>
                   </m:oMath>
                 </a14:m>
-                <a:r>
-                  <a:rPr lang="en-US" dirty="0"/>
-                  <a:t>.</a:t>
-                </a:r>
+                <a:endParaRPr lang="en-US" dirty="0"/>
               </a:p>
               <a:p>
                 <a:r>
                   <a:rPr lang="en-US" dirty="0"/>
-                  <a:t>Sensitive to tail probabilities; encourages accurate distribution tails.</a:t>
+                  <a:t>Sensitive to tail probabilities; encourages accurate distribution tails</a:t>
                 </a:r>
               </a:p>
               <a:p>
@@ -9554,14 +10896,11 @@
                     </m:r>
                   </m:oMath>
                 </a14:m>
-                <a:r>
-                  <a:rPr lang="en-US" dirty="0">
-                    <a:solidFill>
-                      <a:srgbClr val="009749"/>
-                    </a:solidFill>
-                  </a:rPr>
-                  <a:t>.</a:t>
-                </a:r>
+                <a:endParaRPr lang="en-US" dirty="0">
+                  <a:solidFill>
+                    <a:srgbClr val="009749"/>
+                  </a:solidFill>
+                </a:endParaRPr>
               </a:p>
             </p:txBody>
           </p:sp>
@@ -9633,7 +10972,7 @@
           <a:p>
             <a:fld id="{5A064C77-022D-3743-A04E-645624933D1D}" type="slidenum">
               <a:rPr lang="en-US" smtClean="0"/>
-              <a:t>7</a:t>
+              <a:t>8</a:t>
             </a:fld>
             <a:endParaRPr lang="en-US"/>
           </a:p>
@@ -9652,7 +10991,7 @@
 </p:sld>
 </file>
 
-<file path=ppt/slides/slide8.xml><?xml version="1.0" encoding="utf-8"?>
+<file path=ppt/slides/slide9.xml><?xml version="1.0" encoding="utf-8"?>
 <p:sld xmlns:a="http://schemas.openxmlformats.org/drawingml/2006/main" xmlns:r="http://schemas.openxmlformats.org/officeDocument/2006/relationships" xmlns:p="http://schemas.openxmlformats.org/presentationml/2006/main">
   <p:cSld>
     <p:spTree>
@@ -9729,7 +11068,7 @@
               <a:p>
                 <a:r>
                   <a:rPr lang="en-US" dirty="0"/>
-                  <a:t>Generalises the MAE to probabilistic forecasts; widely used in meteorology.</a:t>
+                  <a:t>Generalises the MAE to probabilistic forecasts; widely used in meteorology</a:t>
                 </a:r>
               </a:p>
               <a:p>
@@ -9949,10 +11288,7 @@
                     </m:r>
                   </m:oMath>
                 </a14:m>
-                <a:r>
-                  <a:rPr lang="en-US" dirty="0"/>
-                  <a:t>.</a:t>
-                </a:r>
+                <a:endParaRPr lang="en-US" dirty="0"/>
               </a:p>
               <a:p>
                 <a14:m>
@@ -9987,7 +11323,7 @@
               <a:p>
                 <a:r>
                   <a:rPr lang="en-US" dirty="0"/>
-                  <a:t>Available in closed form for the normal distribution.</a:t>
+                  <a:t>Available in closed form for the normal distribution</a:t>
                 </a:r>
               </a:p>
               <a:p>
@@ -9997,7 +11333,7 @@
                       <a:srgbClr val="009749"/>
                     </a:solidFill>
                   </a:rPr>
-                  <a:t>Example.</a:t>
+                  <a:t>Example</a:t>
                 </a:r>
               </a:p>
             </p:txBody>
@@ -10070,7 +11406,7 @@
           <a:p>
             <a:fld id="{5A064C77-022D-3743-A04E-645624933D1D}" type="slidenum">
               <a:rPr lang="en-US" smtClean="0"/>
-              <a:t>8</a:t>
+              <a:t>9</a:t>
             </a:fld>
             <a:endParaRPr lang="en-US"/>
           </a:p>
@@ -10080,451 +11416,6 @@
     <p:extLst>
       <p:ext uri="{BB962C8B-B14F-4D97-AF65-F5344CB8AC3E}">
         <p14:creationId xmlns:p14="http://schemas.microsoft.com/office/powerpoint/2010/main" val="4041361958"/>
-      </p:ext>
-    </p:extLst>
-  </p:cSld>
-  <p:clrMapOvr>
-    <a:masterClrMapping/>
-  </p:clrMapOvr>
-</p:sld>
-</file>
-
-<file path=ppt/slides/slide9.xml><?xml version="1.0" encoding="utf-8"?>
-<p:sld xmlns:a="http://schemas.openxmlformats.org/drawingml/2006/main" xmlns:r="http://schemas.openxmlformats.org/officeDocument/2006/relationships" xmlns:p="http://schemas.openxmlformats.org/presentationml/2006/main">
-  <p:cSld>
-    <p:spTree>
-      <p:nvGrpSpPr>
-        <p:cNvPr id="1" name=""/>
-        <p:cNvGrpSpPr/>
-        <p:nvPr/>
-      </p:nvGrpSpPr>
-      <p:grpSpPr>
-        <a:xfrm>
-          <a:off x="0" y="0"/>
-          <a:ext cx="0" cy="0"/>
-          <a:chOff x="0" y="0"/>
-          <a:chExt cx="0" cy="0"/>
-        </a:xfrm>
-      </p:grpSpPr>
-      <p:sp>
-        <p:nvSpPr>
-          <p:cNvPr id="2" name="Title 1">
-            <a:extLst>
-              <a:ext uri="{FF2B5EF4-FFF2-40B4-BE49-F238E27FC236}">
-                <a16:creationId xmlns:a16="http://schemas.microsoft.com/office/drawing/2014/main" id="{D1A96095-CD8A-4D90-90FC-FA4C837EDD86}"/>
-              </a:ext>
-            </a:extLst>
-          </p:cNvPr>
-          <p:cNvSpPr>
-            <a:spLocks noGrp="1"/>
-          </p:cNvSpPr>
-          <p:nvPr>
-            <p:ph type="title"/>
-          </p:nvPr>
-        </p:nvSpPr>
-        <p:spPr/>
-        <p:txBody>
-          <a:bodyPr>
-            <a:normAutofit/>
-          </a:bodyPr>
-          <a:lstStyle/>
-          <a:p>
-            <a:r>
-              <a:rPr lang="en-US" dirty="0"/>
-              <a:t>Probabilistic Output Layers</a:t>
-            </a:r>
-          </a:p>
-        </p:txBody>
-      </p:sp>
-      <mc:AlternateContent xmlns:mc="http://schemas.openxmlformats.org/markup-compatibility/2006" xmlns:a14="http://schemas.microsoft.com/office/drawing/2010/main">
-        <mc:Choice Requires="a14">
-          <p:sp>
-            <p:nvSpPr>
-              <p:cNvPr id="3" name="Content Placeholder 2">
-                <a:extLst>
-                  <a:ext uri="{FF2B5EF4-FFF2-40B4-BE49-F238E27FC236}">
-                    <a16:creationId xmlns:a16="http://schemas.microsoft.com/office/drawing/2014/main" id="{002E4312-FB78-2B38-8E70-759BE6ABE724}"/>
-                  </a:ext>
-                </a:extLst>
-              </p:cNvPr>
-              <p:cNvSpPr>
-                <a:spLocks noGrp="1"/>
-              </p:cNvSpPr>
-              <p:nvPr>
-                <p:ph idx="1"/>
-              </p:nvPr>
-            </p:nvSpPr>
-            <p:spPr/>
-            <p:txBody>
-              <a:bodyPr>
-                <a:normAutofit/>
-              </a:bodyPr>
-              <a:lstStyle/>
-              <a:p>
-                <a:r>
-                  <a:rPr lang="en-US" dirty="0"/>
-                  <a:t>Use a proper scoring rule as the loss function.</a:t>
-                </a:r>
-              </a:p>
-              <a:p>
-                <a:r>
-                  <a:rPr lang="en-US" dirty="0"/>
-                  <a:t>For Gaussian outputs: the NN outputs e.g. </a:t>
-                </a:r>
-                <a14:m>
-                  <m:oMath xmlns:m="http://schemas.openxmlformats.org/officeDocument/2006/math">
-                    <m:r>
-                      <a:rPr lang="en-US" i="1" dirty="0" smtClean="0">
-                        <a:latin typeface="Cambria Math" panose="02040503050406030204" pitchFamily="18" charset="0"/>
-                      </a:rPr>
-                      <m:t>𝜇</m:t>
-                    </m:r>
-                  </m:oMath>
-                </a14:m>
-                <a:r>
-                  <a:rPr lang="en-US" dirty="0"/>
-                  <a:t> and </a:t>
-                </a:r>
-                <a14:m>
-                  <m:oMath xmlns:m="http://schemas.openxmlformats.org/officeDocument/2006/math">
-                    <m:r>
-                      <a:rPr lang="en-IE" b="0" i="1" dirty="0" smtClean="0">
-                        <a:latin typeface="Cambria Math" panose="02040503050406030204" pitchFamily="18" charset="0"/>
-                      </a:rPr>
-                      <m:t>𝑠𝑜𝑓𝑡𝑝𝑙𝑢𝑠</m:t>
-                    </m:r>
-                    <m:r>
-                      <a:rPr lang="en-IE" b="0" i="1" dirty="0" smtClean="0">
-                        <a:latin typeface="Cambria Math" panose="02040503050406030204" pitchFamily="18" charset="0"/>
-                      </a:rPr>
-                      <m:t>(</m:t>
-                    </m:r>
-                    <m:r>
-                      <a:rPr lang="en-US" i="1" dirty="0" smtClean="0">
-                        <a:latin typeface="Cambria Math" panose="02040503050406030204" pitchFamily="18" charset="0"/>
-                      </a:rPr>
-                      <m:t>𝜎</m:t>
-                    </m:r>
-                    <m:r>
-                      <a:rPr lang="en-IE" b="0" i="1" dirty="0" smtClean="0">
-                        <a:latin typeface="Cambria Math" panose="02040503050406030204" pitchFamily="18" charset="0"/>
-                      </a:rPr>
-                      <m:t>)</m:t>
-                    </m:r>
-                  </m:oMath>
-                </a14:m>
-                <a:r>
-                  <a:rPr lang="en-US" dirty="0"/>
-                  <a:t> so that </a:t>
-                </a:r>
-                <a14:m>
-                  <m:oMath xmlns:m="http://schemas.openxmlformats.org/officeDocument/2006/math">
-                    <m:r>
-                      <a:rPr lang="en-US" i="1" dirty="0" smtClean="0">
-                        <a:latin typeface="Cambria Math" panose="02040503050406030204" pitchFamily="18" charset="0"/>
-                      </a:rPr>
-                      <m:t>𝜎</m:t>
-                    </m:r>
-                    <m:r>
-                      <a:rPr lang="en-US" i="1" dirty="0" smtClean="0">
-                        <a:latin typeface="Cambria Math" panose="02040503050406030204" pitchFamily="18" charset="0"/>
-                      </a:rPr>
-                      <m:t> =</m:t>
-                    </m:r>
-                  </m:oMath>
-                </a14:m>
-                <a:r>
-                  <a:rPr lang="en-US" dirty="0"/>
-                  <a:t> </a:t>
-                </a:r>
-                <a14:m>
-                  <m:oMath xmlns:m="http://schemas.openxmlformats.org/officeDocument/2006/math">
-                    <m:r>
-                      <m:rPr>
-                        <m:sty m:val="p"/>
-                      </m:rPr>
-                      <a:rPr lang="en-US" i="1" dirty="0">
-                        <a:latin typeface="Cambria Math" panose="02040503050406030204" pitchFamily="18" charset="0"/>
-                      </a:rPr>
-                      <m:t>log</m:t>
-                    </m:r>
-                    <m:r>
-                      <a:rPr lang="en-IE" i="1" dirty="0">
-                        <a:latin typeface="Cambria Math" panose="02040503050406030204" pitchFamily="18" charset="0"/>
-                      </a:rPr>
-                      <m:t>(1+</m:t>
-                    </m:r>
-                    <m:sSup>
-                      <m:sSupPr>
-                        <m:ctrlPr>
-                          <a:rPr lang="en-IE" i="1" dirty="0">
-                            <a:latin typeface="Cambria Math" panose="02040503050406030204" pitchFamily="18" charset="0"/>
-                          </a:rPr>
-                        </m:ctrlPr>
-                      </m:sSupPr>
-                      <m:e>
-                        <m:r>
-                          <a:rPr lang="en-IE" i="1" dirty="0">
-                            <a:latin typeface="Cambria Math" panose="02040503050406030204" pitchFamily="18" charset="0"/>
-                          </a:rPr>
-                          <m:t>𝑒</m:t>
-                        </m:r>
-                      </m:e>
-                      <m:sup>
-                        <m:acc>
-                          <m:accPr>
-                            <m:chr m:val="̂"/>
-                            <m:ctrlPr>
-                              <a:rPr lang="en-IE" i="1" dirty="0">
-                                <a:latin typeface="Cambria Math" panose="02040503050406030204" pitchFamily="18" charset="0"/>
-                              </a:rPr>
-                            </m:ctrlPr>
-                          </m:accPr>
-                          <m:e>
-                            <m:r>
-                              <a:rPr lang="en-IE" i="1" dirty="0">
-                                <a:latin typeface="Cambria Math" panose="02040503050406030204" pitchFamily="18" charset="0"/>
-                              </a:rPr>
-                              <m:t>𝑦</m:t>
-                            </m:r>
-                          </m:e>
-                        </m:acc>
-                      </m:sup>
-                    </m:sSup>
-                    <m:r>
-                      <a:rPr lang="en-IE" i="1" dirty="0">
-                        <a:latin typeface="Cambria Math" panose="02040503050406030204" pitchFamily="18" charset="0"/>
-                      </a:rPr>
-                      <m:t>)</m:t>
-                    </m:r>
-                  </m:oMath>
-                </a14:m>
-                <a:r>
-                  <a:rPr lang="en-US" dirty="0"/>
-                  <a:t>.</a:t>
-                </a:r>
-              </a:p>
-              <a:p>
-                <a:r>
-                  <a:rPr lang="en-US" dirty="0"/>
-                  <a:t>Negative log-likelihood (NLL) loss = </a:t>
-                </a:r>
-                <a14:m>
-                  <m:oMath xmlns:m="http://schemas.openxmlformats.org/officeDocument/2006/math">
-                    <m:r>
-                      <a:rPr lang="en-US" i="1" dirty="0" smtClean="0">
-                        <a:latin typeface="Cambria Math" panose="02040503050406030204" pitchFamily="18" charset="0"/>
-                      </a:rPr>
-                      <m:t>0.5 </m:t>
-                    </m:r>
-                    <m:sSup>
-                      <m:sSupPr>
-                        <m:ctrlPr>
-                          <a:rPr lang="en-US" i="1" dirty="0" smtClean="0">
-                            <a:latin typeface="Cambria Math" panose="02040503050406030204" pitchFamily="18" charset="0"/>
-                          </a:rPr>
-                        </m:ctrlPr>
-                      </m:sSupPr>
-                      <m:e>
-                        <m:d>
-                          <m:dPr>
-                            <m:ctrlPr>
-                              <a:rPr lang="en-US" i="1" dirty="0" smtClean="0">
-                                <a:latin typeface="Cambria Math" panose="02040503050406030204" pitchFamily="18" charset="0"/>
-                              </a:rPr>
-                            </m:ctrlPr>
-                          </m:dPr>
-                          <m:e>
-                            <m:f>
-                              <m:fPr>
-                                <m:ctrlPr>
-                                  <a:rPr lang="en-US" i="1" dirty="0" smtClean="0">
-                                    <a:latin typeface="Cambria Math" panose="02040503050406030204" pitchFamily="18" charset="0"/>
-                                  </a:rPr>
-                                </m:ctrlPr>
-                              </m:fPr>
-                              <m:num>
-                                <m:r>
-                                  <a:rPr lang="en-US" i="1" dirty="0" smtClean="0">
-                                    <a:latin typeface="Cambria Math" panose="02040503050406030204" pitchFamily="18" charset="0"/>
-                                  </a:rPr>
-                                  <m:t>𝑦</m:t>
-                                </m:r>
-                                <m:r>
-                                  <a:rPr lang="en-US" i="1" dirty="0" smtClean="0">
-                                    <a:latin typeface="Cambria Math" panose="02040503050406030204" pitchFamily="18" charset="0"/>
-                                  </a:rPr>
-                                  <m:t>−</m:t>
-                                </m:r>
-                                <m:r>
-                                  <a:rPr lang="en-IE" b="0" i="1" dirty="0" smtClean="0">
-                                    <a:latin typeface="Cambria Math" panose="02040503050406030204" pitchFamily="18" charset="0"/>
-                                  </a:rPr>
-                                  <m:t>𝜇</m:t>
-                                </m:r>
-                              </m:num>
-                              <m:den>
-                                <m:r>
-                                  <a:rPr lang="en-IE" b="0" i="1" dirty="0" smtClean="0">
-                                    <a:latin typeface="Cambria Math" panose="02040503050406030204" pitchFamily="18" charset="0"/>
-                                  </a:rPr>
-                                  <m:t>𝜎</m:t>
-                                </m:r>
-                              </m:den>
-                            </m:f>
-                          </m:e>
-                        </m:d>
-                      </m:e>
-                      <m:sup>
-                        <m:r>
-                          <a:rPr lang="en-IE" b="0" i="1" dirty="0" smtClean="0">
-                            <a:latin typeface="Cambria Math" panose="02040503050406030204" pitchFamily="18" charset="0"/>
-                          </a:rPr>
-                          <m:t>2</m:t>
-                        </m:r>
-                      </m:sup>
-                    </m:sSup>
-                    <m:r>
-                      <a:rPr lang="en-US" i="1" dirty="0" smtClean="0">
-                        <a:latin typeface="Cambria Math" panose="02040503050406030204" pitchFamily="18" charset="0"/>
-                      </a:rPr>
-                      <m:t> +</m:t>
-                    </m:r>
-                    <m:r>
-                      <a:rPr lang="en-IE" b="0" i="1" dirty="0" smtClean="0">
-                        <a:latin typeface="Cambria Math" panose="02040503050406030204" pitchFamily="18" charset="0"/>
-                      </a:rPr>
-                      <m:t>𝑙𝑜𝑔</m:t>
-                    </m:r>
-                    <m:r>
-                      <a:rPr lang="en-US" i="1" dirty="0" smtClean="0">
-                        <a:latin typeface="Cambria Math" panose="02040503050406030204" pitchFamily="18" charset="0"/>
-                      </a:rPr>
-                      <m:t>⁡</m:t>
-                    </m:r>
-                    <m:r>
-                      <a:rPr lang="en-IE" b="0" i="1" dirty="0" smtClean="0">
-                        <a:latin typeface="Cambria Math" panose="02040503050406030204" pitchFamily="18" charset="0"/>
-                      </a:rPr>
-                      <m:t>𝜎</m:t>
-                    </m:r>
-                    <m:r>
-                      <a:rPr lang="en-US" i="1" dirty="0" smtClean="0">
-                        <a:latin typeface="Cambria Math" panose="02040503050406030204" pitchFamily="18" charset="0"/>
-                      </a:rPr>
-                      <m:t> + </m:t>
-                    </m:r>
-                    <m:r>
-                      <a:rPr lang="en-US" i="1" dirty="0" smtClean="0">
-                        <a:latin typeface="Cambria Math" panose="02040503050406030204" pitchFamily="18" charset="0"/>
-                      </a:rPr>
-                      <m:t>𝑐𝑜𝑛𝑠𝑡</m:t>
-                    </m:r>
-                  </m:oMath>
-                </a14:m>
-                <a:r>
-                  <a:rPr lang="en-US" dirty="0"/>
-                  <a:t>.</a:t>
-                </a:r>
-              </a:p>
-              <a:p>
-                <a:r>
-                  <a:rPr lang="en-US" dirty="0"/>
-                  <a:t>CRPS loss can be computed in closed form for Gaussian distributions.</a:t>
-                </a:r>
-              </a:p>
-              <a:p>
-                <a:r>
-                  <a:rPr lang="en-US" dirty="0">
-                    <a:solidFill>
-                      <a:srgbClr val="009749"/>
-                    </a:solidFill>
-                  </a:rPr>
-                  <a:t>Go through forward pass on the board</a:t>
-                </a:r>
-              </a:p>
-              <a:p>
-                <a:pPr marL="0" indent="0">
-                  <a:buNone/>
-                </a:pPr>
-                <a:endParaRPr lang="en-US" dirty="0"/>
-              </a:p>
-            </p:txBody>
-          </p:sp>
-        </mc:Choice>
-        <mc:Fallback xmlns="">
-          <p:sp>
-            <p:nvSpPr>
-              <p:cNvPr id="3" name="Content Placeholder 2">
-                <a:extLst>
-                  <a:ext uri="{FF2B5EF4-FFF2-40B4-BE49-F238E27FC236}">
-                    <a16:creationId xmlns:a16="http://schemas.microsoft.com/office/drawing/2014/main" id="{002E4312-FB78-2B38-8E70-759BE6ABE724}"/>
-                  </a:ext>
-                </a:extLst>
-              </p:cNvPr>
-              <p:cNvSpPr>
-                <a:spLocks noGrp="1" noRot="1" noChangeAspect="1" noMove="1" noResize="1" noEditPoints="1" noAdjustHandles="1" noChangeArrowheads="1" noChangeShapeType="1" noTextEdit="1"/>
-              </p:cNvSpPr>
-              <p:nvPr>
-                <p:ph idx="1"/>
-              </p:nvPr>
-            </p:nvSpPr>
-            <p:spPr>
-              <a:blipFill>
-                <a:blip r:embed="rId2"/>
-                <a:stretch>
-                  <a:fillRect l="-1368" t="-2439"/>
-                </a:stretch>
-              </a:blipFill>
-            </p:spPr>
-            <p:txBody>
-              <a:bodyPr/>
-              <a:lstStyle/>
-              <a:p>
-                <a:r>
-                  <a:rPr lang="en-US">
-                    <a:noFill/>
-                  </a:rPr>
-                  <a:t> </a:t>
-                </a:r>
-              </a:p>
-            </p:txBody>
-          </p:sp>
-        </mc:Fallback>
-      </mc:AlternateContent>
-      <p:sp>
-        <p:nvSpPr>
-          <p:cNvPr id="4" name="Slide Number Placeholder 3">
-            <a:extLst>
-              <a:ext uri="{FF2B5EF4-FFF2-40B4-BE49-F238E27FC236}">
-                <a16:creationId xmlns:a16="http://schemas.microsoft.com/office/drawing/2014/main" id="{47285E25-64A7-C03B-AE84-49713C566E91}"/>
-              </a:ext>
-            </a:extLst>
-          </p:cNvPr>
-          <p:cNvSpPr>
-            <a:spLocks noGrp="1"/>
-          </p:cNvSpPr>
-          <p:nvPr>
-            <p:ph type="sldNum" sz="quarter" idx="12"/>
-          </p:nvPr>
-        </p:nvSpPr>
-        <p:spPr/>
-        <p:txBody>
-          <a:bodyPr/>
-          <a:lstStyle/>
-          <a:p>
-            <a:fld id="{5A064C77-022D-3743-A04E-645624933D1D}" type="slidenum">
-              <a:rPr lang="en-US" smtClean="0"/>
-              <a:t>9</a:t>
-            </a:fld>
-            <a:endParaRPr lang="en-US"/>
-          </a:p>
-        </p:txBody>
-      </p:sp>
-    </p:spTree>
-    <p:extLst>
-      <p:ext uri="{BB962C8B-B14F-4D97-AF65-F5344CB8AC3E}">
-        <p14:creationId xmlns:p14="http://schemas.microsoft.com/office/powerpoint/2010/main" val="1906068732"/>
       </p:ext>
     </p:extLst>
   </p:cSld>
